--- a/presentation/WayFair E-commerce Analysis.pptx
+++ b/presentation/WayFair E-commerce Analysis.pptx
@@ -126,8 +126,8 @@
 <pc:chgInfo xmlns:a="http://schemas.openxmlformats.org/drawingml/2006/main" xmlns:r="http://schemas.openxmlformats.org/officeDocument/2006/relationships" xmlns:ac="http://schemas.microsoft.com/office/drawing/2013/main/command" xmlns:pc="http://schemas.microsoft.com/office/powerpoint/2013/main/command">
   <pc:docChgLst>
     <pc:chgData name="Keerti Gurung" userId="e2354b7e34d2f498" providerId="LiveId" clId="{003F203D-70B0-4059-9844-D7232372AAB9}"/>
-    <pc:docChg chg="modSld">
-      <pc:chgData name="Keerti Gurung" userId="e2354b7e34d2f498" providerId="LiveId" clId="{003F203D-70B0-4059-9844-D7232372AAB9}" dt="2026-09-22T13:09:46.752" v="1" actId="122"/>
+    <pc:docChg chg="undo redo custSel modSld">
+      <pc:chgData name="Keerti Gurung" userId="e2354b7e34d2f498" providerId="LiveId" clId="{003F203D-70B0-4059-9844-D7232372AAB9}" dt="2026-09-26T08:28:18.501" v="1013" actId="1076"/>
       <pc:docMkLst>
         <pc:docMk/>
       </pc:docMkLst>
@@ -145,6 +145,297 @@
             <ac:spMk id="3" creationId="{F38D0DE3-630C-42EC-9F5C-B6AFD109F3C9}"/>
           </ac:spMkLst>
         </pc:spChg>
+      </pc:sldChg>
+      <pc:sldChg chg="modSp mod">
+        <pc:chgData name="Keerti Gurung" userId="e2354b7e34d2f498" providerId="LiveId" clId="{003F203D-70B0-4059-9844-D7232372AAB9}" dt="2026-09-26T07:33:55.687" v="351" actId="20577"/>
+        <pc:sldMkLst>
+          <pc:docMk/>
+          <pc:sldMk cId="3440653884" sldId="257"/>
+        </pc:sldMkLst>
+        <pc:spChg chg="mod">
+          <ac:chgData name="Keerti Gurung" userId="e2354b7e34d2f498" providerId="LiveId" clId="{003F203D-70B0-4059-9844-D7232372AAB9}" dt="2026-09-26T07:33:55.687" v="351" actId="20577"/>
+          <ac:spMkLst>
+            <pc:docMk/>
+            <pc:sldMk cId="3440653884" sldId="257"/>
+            <ac:spMk id="3" creationId="{ADAF1F93-4CE4-4633-96F8-92A0B1365EC9}"/>
+          </ac:spMkLst>
+        </pc:spChg>
+      </pc:sldChg>
+      <pc:sldChg chg="addSp delSp modSp mod modClrScheme chgLayout">
+        <pc:chgData name="Keerti Gurung" userId="e2354b7e34d2f498" providerId="LiveId" clId="{003F203D-70B0-4059-9844-D7232372AAB9}" dt="2026-09-26T08:22:27.386" v="1001" actId="20577"/>
+        <pc:sldMkLst>
+          <pc:docMk/>
+          <pc:sldMk cId="1944091636" sldId="258"/>
+        </pc:sldMkLst>
+        <pc:spChg chg="mod ord">
+          <ac:chgData name="Keerti Gurung" userId="e2354b7e34d2f498" providerId="LiveId" clId="{003F203D-70B0-4059-9844-D7232372AAB9}" dt="2026-09-26T07:27:49.010" v="257" actId="700"/>
+          <ac:spMkLst>
+            <pc:docMk/>
+            <pc:sldMk cId="1944091636" sldId="258"/>
+            <ac:spMk id="2" creationId="{1E21523D-E30E-458A-8F1B-941AFFEE950B}"/>
+          </ac:spMkLst>
+        </pc:spChg>
+        <pc:spChg chg="del mod">
+          <ac:chgData name="Keerti Gurung" userId="e2354b7e34d2f498" providerId="LiveId" clId="{003F203D-70B0-4059-9844-D7232372AAB9}" dt="2026-09-26T07:27:43.140" v="256" actId="21"/>
+          <ac:spMkLst>
+            <pc:docMk/>
+            <pc:sldMk cId="1944091636" sldId="258"/>
+            <ac:spMk id="3" creationId="{2B48E66E-38FA-4989-A8E2-ABA40C5B2822}"/>
+          </ac:spMkLst>
+        </pc:spChg>
+        <pc:spChg chg="add del mod ord">
+          <ac:chgData name="Keerti Gurung" userId="e2354b7e34d2f498" providerId="LiveId" clId="{003F203D-70B0-4059-9844-D7232372AAB9}" dt="2026-09-26T07:27:49.010" v="257" actId="700"/>
+          <ac:spMkLst>
+            <pc:docMk/>
+            <pc:sldMk cId="1944091636" sldId="258"/>
+            <ac:spMk id="5" creationId="{42058AE6-C6FF-435E-8DF4-E67584D7B5BE}"/>
+          </ac:spMkLst>
+        </pc:spChg>
+        <pc:spChg chg="del mod">
+          <ac:chgData name="Keerti Gurung" userId="e2354b7e34d2f498" providerId="LiveId" clId="{003F203D-70B0-4059-9844-D7232372AAB9}" dt="2026-09-26T07:28:13.330" v="262" actId="21"/>
+          <ac:spMkLst>
+            <pc:docMk/>
+            <pc:sldMk cId="1944091636" sldId="258"/>
+            <ac:spMk id="6" creationId="{B65EA871-F84D-4B02-AA7F-5C2BDFC350EB}"/>
+          </ac:spMkLst>
+        </pc:spChg>
+        <pc:spChg chg="del mod">
+          <ac:chgData name="Keerti Gurung" userId="e2354b7e34d2f498" providerId="LiveId" clId="{003F203D-70B0-4059-9844-D7232372AAB9}" dt="2026-09-26T07:28:19.390" v="264" actId="21"/>
+          <ac:spMkLst>
+            <pc:docMk/>
+            <pc:sldMk cId="1944091636" sldId="258"/>
+            <ac:spMk id="7" creationId="{BBA0F283-6DDC-40F8-AA5E-059B6358964D}"/>
+          </ac:spMkLst>
+        </pc:spChg>
+        <pc:spChg chg="del mod">
+          <ac:chgData name="Keerti Gurung" userId="e2354b7e34d2f498" providerId="LiveId" clId="{003F203D-70B0-4059-9844-D7232372AAB9}" dt="2026-09-26T07:28:31.750" v="267" actId="21"/>
+          <ac:spMkLst>
+            <pc:docMk/>
+            <pc:sldMk cId="1944091636" sldId="258"/>
+            <ac:spMk id="9" creationId="{F3AB4831-6BD1-4AB0-99FE-BDD6AC5F7198}"/>
+          </ac:spMkLst>
+        </pc:spChg>
+        <pc:spChg chg="del">
+          <ac:chgData name="Keerti Gurung" userId="e2354b7e34d2f498" providerId="LiveId" clId="{003F203D-70B0-4059-9844-D7232372AAB9}" dt="2026-09-26T07:28:25.640" v="265" actId="21"/>
+          <ac:spMkLst>
+            <pc:docMk/>
+            <pc:sldMk cId="1944091636" sldId="258"/>
+            <ac:spMk id="10" creationId="{1C453C4B-1402-4BBA-82A8-6181F4A183AC}"/>
+          </ac:spMkLst>
+        </pc:spChg>
+        <pc:spChg chg="add del mod">
+          <ac:chgData name="Keerti Gurung" userId="e2354b7e34d2f498" providerId="LiveId" clId="{003F203D-70B0-4059-9844-D7232372AAB9}" dt="2026-09-26T07:27:57.610" v="259"/>
+          <ac:spMkLst>
+            <pc:docMk/>
+            <pc:sldMk cId="1944091636" sldId="258"/>
+            <ac:spMk id="11" creationId="{2D9E52A5-5F82-42DC-8B48-D5469D5F2160}"/>
+          </ac:spMkLst>
+        </pc:spChg>
+        <pc:spChg chg="mod ord">
+          <ac:chgData name="Keerti Gurung" userId="e2354b7e34d2f498" providerId="LiveId" clId="{003F203D-70B0-4059-9844-D7232372AAB9}" dt="2026-09-26T08:22:27.386" v="1001" actId="20577"/>
+          <ac:spMkLst>
+            <pc:docMk/>
+            <pc:sldMk cId="1944091636" sldId="258"/>
+            <ac:spMk id="14" creationId="{141B7ED8-3E2F-4C8D-9B70-29F4794794B3}"/>
+          </ac:spMkLst>
+        </pc:spChg>
+        <pc:graphicFrameChg chg="add mod modGraphic">
+          <ac:chgData name="Keerti Gurung" userId="e2354b7e34d2f498" providerId="LiveId" clId="{003F203D-70B0-4059-9844-D7232372AAB9}" dt="2026-09-26T08:22:21.186" v="1000" actId="1076"/>
+          <ac:graphicFrameMkLst>
+            <pc:docMk/>
+            <pc:sldMk cId="1944091636" sldId="258"/>
+            <ac:graphicFrameMk id="3" creationId="{A30C8665-A924-49B1-8678-5A845EE38EAF}"/>
+          </ac:graphicFrameMkLst>
+        </pc:graphicFrameChg>
+        <pc:graphicFrameChg chg="add del mod modGraphic">
+          <ac:chgData name="Keerti Gurung" userId="e2354b7e34d2f498" providerId="LiveId" clId="{003F203D-70B0-4059-9844-D7232372AAB9}" dt="2026-09-26T08:08:53.927" v="546" actId="21"/>
+          <ac:graphicFrameMkLst>
+            <pc:docMk/>
+            <pc:sldMk cId="1944091636" sldId="258"/>
+            <ac:graphicFrameMk id="5" creationId="{70ADB0B1-BE89-407C-AFD5-8AB8BA8135F4}"/>
+          </ac:graphicFrameMkLst>
+        </pc:graphicFrameChg>
+        <pc:graphicFrameChg chg="add del mod modGraphic">
+          <ac:chgData name="Keerti Gurung" userId="e2354b7e34d2f498" providerId="LiveId" clId="{003F203D-70B0-4059-9844-D7232372AAB9}" dt="2026-09-26T08:20:40.536" v="987" actId="21"/>
+          <ac:graphicFrameMkLst>
+            <pc:docMk/>
+            <pc:sldMk cId="1944091636" sldId="258"/>
+            <ac:graphicFrameMk id="6" creationId="{F79B5AB3-B8A1-4A1C-AF3B-290C15B05D63}"/>
+          </ac:graphicFrameMkLst>
+        </pc:graphicFrameChg>
+        <pc:graphicFrameChg chg="add del mod modGraphic">
+          <ac:chgData name="Keerti Gurung" userId="e2354b7e34d2f498" providerId="LiveId" clId="{003F203D-70B0-4059-9844-D7232372AAB9}" dt="2026-09-26T08:08:22.666" v="539" actId="21"/>
+          <ac:graphicFrameMkLst>
+            <pc:docMk/>
+            <pc:sldMk cId="1944091636" sldId="258"/>
+            <ac:graphicFrameMk id="8" creationId="{36086A13-C61A-4BF2-8EF2-B3761680D0E7}"/>
+          </ac:graphicFrameMkLst>
+        </pc:graphicFrameChg>
+      </pc:sldChg>
+      <pc:sldChg chg="addSp delSp modSp mod">
+        <pc:chgData name="Keerti Gurung" userId="e2354b7e34d2f498" providerId="LiveId" clId="{003F203D-70B0-4059-9844-D7232372AAB9}" dt="2026-09-26T07:55:36.256" v="501" actId="14100"/>
+        <pc:sldMkLst>
+          <pc:docMk/>
+          <pc:sldMk cId="1152110882" sldId="260"/>
+        </pc:sldMkLst>
+        <pc:spChg chg="mod">
+          <ac:chgData name="Keerti Gurung" userId="e2354b7e34d2f498" providerId="LiveId" clId="{003F203D-70B0-4059-9844-D7232372AAB9}" dt="2026-09-26T07:55:36.256" v="501" actId="14100"/>
+          <ac:spMkLst>
+            <pc:docMk/>
+            <pc:sldMk cId="1152110882" sldId="260"/>
+            <ac:spMk id="9" creationId="{56D81C15-7D36-4C39-B24F-C0729E27B474}"/>
+          </ac:spMkLst>
+        </pc:spChg>
+        <pc:spChg chg="add del mod">
+          <ac:chgData name="Keerti Gurung" userId="e2354b7e34d2f498" providerId="LiveId" clId="{003F203D-70B0-4059-9844-D7232372AAB9}" dt="2026-09-26T07:52:38.486" v="469" actId="21"/>
+          <ac:spMkLst>
+            <pc:docMk/>
+            <pc:sldMk cId="1152110882" sldId="260"/>
+            <ac:spMk id="10" creationId="{A372BB4B-3216-41D8-80BE-75F469586810}"/>
+          </ac:spMkLst>
+        </pc:spChg>
+        <pc:spChg chg="del mod">
+          <ac:chgData name="Keerti Gurung" userId="e2354b7e34d2f498" providerId="LiveId" clId="{003F203D-70B0-4059-9844-D7232372AAB9}" dt="2026-09-26T07:54:56.741" v="499" actId="21"/>
+          <ac:spMkLst>
+            <pc:docMk/>
+            <pc:sldMk cId="1152110882" sldId="260"/>
+            <ac:spMk id="11" creationId="{6A2F1DA0-0748-43BD-B738-A37CF5E0BEC5}"/>
+          </ac:spMkLst>
+        </pc:spChg>
+        <pc:spChg chg="del">
+          <ac:chgData name="Keerti Gurung" userId="e2354b7e34d2f498" providerId="LiveId" clId="{003F203D-70B0-4059-9844-D7232372AAB9}" dt="2026-09-26T07:21:44.033" v="240" actId="21"/>
+          <ac:spMkLst>
+            <pc:docMk/>
+            <pc:sldMk cId="1152110882" sldId="260"/>
+            <ac:spMk id="12" creationId="{81F87F97-2E12-4EEE-B4AA-D3E49B4A083D}"/>
+          </ac:spMkLst>
+        </pc:spChg>
+        <pc:spChg chg="add del mod">
+          <ac:chgData name="Keerti Gurung" userId="e2354b7e34d2f498" providerId="LiveId" clId="{003F203D-70B0-4059-9844-D7232372AAB9}" dt="2026-09-26T07:50:10.589" v="425"/>
+          <ac:spMkLst>
+            <pc:docMk/>
+            <pc:sldMk cId="1152110882" sldId="260"/>
+            <ac:spMk id="13" creationId="{886EC8AC-5461-4239-8AD2-102458FB43C2}"/>
+          </ac:spMkLst>
+        </pc:spChg>
+        <pc:spChg chg="del mod">
+          <ac:chgData name="Keerti Gurung" userId="e2354b7e34d2f498" providerId="LiveId" clId="{003F203D-70B0-4059-9844-D7232372AAB9}" dt="2026-09-26T07:52:27.860" v="468" actId="21"/>
+          <ac:spMkLst>
+            <pc:docMk/>
+            <pc:sldMk cId="1152110882" sldId="260"/>
+            <ac:spMk id="15" creationId="{640E721F-2559-41AC-B746-C3798032FD90}"/>
+          </ac:spMkLst>
+        </pc:spChg>
+        <pc:picChg chg="mod">
+          <ac:chgData name="Keerti Gurung" userId="e2354b7e34d2f498" providerId="LiveId" clId="{003F203D-70B0-4059-9844-D7232372AAB9}" dt="2026-09-26T07:54:34.882" v="498" actId="1076"/>
+          <ac:picMkLst>
+            <pc:docMk/>
+            <pc:sldMk cId="1152110882" sldId="260"/>
+            <ac:picMk id="16" creationId="{1394E010-9E1B-4FB8-A510-80DDFD780E57}"/>
+          </ac:picMkLst>
+        </pc:picChg>
+      </pc:sldChg>
+      <pc:sldChg chg="addSp delSp modSp mod">
+        <pc:chgData name="Keerti Gurung" userId="e2354b7e34d2f498" providerId="LiveId" clId="{003F203D-70B0-4059-9844-D7232372AAB9}" dt="2026-09-26T07:37:55.033" v="370" actId="1076"/>
+        <pc:sldMkLst>
+          <pc:docMk/>
+          <pc:sldMk cId="2245566905" sldId="261"/>
+        </pc:sldMkLst>
+        <pc:spChg chg="add del mod">
+          <ac:chgData name="Keerti Gurung" userId="e2354b7e34d2f498" providerId="LiveId" clId="{003F203D-70B0-4059-9844-D7232372AAB9}" dt="2026-09-26T07:35:35.950" v="354" actId="21"/>
+          <ac:spMkLst>
+            <pc:docMk/>
+            <pc:sldMk cId="2245566905" sldId="261"/>
+            <ac:spMk id="3" creationId="{24E2B373-EEF6-4698-93F3-ED2AA72B0043}"/>
+          </ac:spMkLst>
+        </pc:spChg>
+        <pc:spChg chg="mod">
+          <ac:chgData name="Keerti Gurung" userId="e2354b7e34d2f498" providerId="LiveId" clId="{003F203D-70B0-4059-9844-D7232372AAB9}" dt="2026-09-26T07:37:55.033" v="370" actId="1076"/>
+          <ac:spMkLst>
+            <pc:docMk/>
+            <pc:sldMk cId="2245566905" sldId="261"/>
+            <ac:spMk id="9" creationId="{0C9F4D20-AF1B-4D68-A38B-1A93E674F3FC}"/>
+          </ac:spMkLst>
+        </pc:spChg>
+        <pc:spChg chg="mod">
+          <ac:chgData name="Keerti Gurung" userId="e2354b7e34d2f498" providerId="LiveId" clId="{003F203D-70B0-4059-9844-D7232372AAB9}" dt="2026-09-26T07:37:39.436" v="368" actId="1076"/>
+          <ac:spMkLst>
+            <pc:docMk/>
+            <pc:sldMk cId="2245566905" sldId="261"/>
+            <ac:spMk id="12" creationId="{49DBFDFD-8383-40F0-91F0-51E3D2811CA6}"/>
+          </ac:spMkLst>
+        </pc:spChg>
+      </pc:sldChg>
+      <pc:sldChg chg="modSp mod">
+        <pc:chgData name="Keerti Gurung" userId="e2354b7e34d2f498" providerId="LiveId" clId="{003F203D-70B0-4059-9844-D7232372AAB9}" dt="2026-09-26T08:28:18.501" v="1013" actId="1076"/>
+        <pc:sldMkLst>
+          <pc:docMk/>
+          <pc:sldMk cId="3162001317" sldId="262"/>
+        </pc:sldMkLst>
+        <pc:spChg chg="mod">
+          <ac:chgData name="Keerti Gurung" userId="e2354b7e34d2f498" providerId="LiveId" clId="{003F203D-70B0-4059-9844-D7232372AAB9}" dt="2026-09-26T07:19:28.477" v="228" actId="27636"/>
+          <ac:spMkLst>
+            <pc:docMk/>
+            <pc:sldMk cId="3162001317" sldId="262"/>
+            <ac:spMk id="3" creationId="{313A2CBB-4DA8-40AF-8AE5-E662E359513A}"/>
+          </ac:spMkLst>
+        </pc:spChg>
+        <pc:spChg chg="mod">
+          <ac:chgData name="Keerti Gurung" userId="e2354b7e34d2f498" providerId="LiveId" clId="{003F203D-70B0-4059-9844-D7232372AAB9}" dt="2026-09-26T08:28:18.501" v="1013" actId="1076"/>
+          <ac:spMkLst>
+            <pc:docMk/>
+            <pc:sldMk cId="3162001317" sldId="262"/>
+            <ac:spMk id="4" creationId="{DB4F1738-82F0-4555-964B-CB0472CF4BB9}"/>
+          </ac:spMkLst>
+        </pc:spChg>
+        <pc:spChg chg="mod">
+          <ac:chgData name="Keerti Gurung" userId="e2354b7e34d2f498" providerId="LiveId" clId="{003F203D-70B0-4059-9844-D7232372AAB9}" dt="2026-09-26T08:27:31.144" v="1007" actId="13822"/>
+          <ac:spMkLst>
+            <pc:docMk/>
+            <pc:sldMk cId="3162001317" sldId="262"/>
+            <ac:spMk id="5" creationId="{8D26091E-929F-471D-AF8B-ACBA28B319DA}"/>
+          </ac:spMkLst>
+        </pc:spChg>
+        <pc:spChg chg="mod">
+          <ac:chgData name="Keerti Gurung" userId="e2354b7e34d2f498" providerId="LiveId" clId="{003F203D-70B0-4059-9844-D7232372AAB9}" dt="2026-09-26T07:20:41.227" v="235" actId="13822"/>
+          <ac:spMkLst>
+            <pc:docMk/>
+            <pc:sldMk cId="3162001317" sldId="262"/>
+            <ac:spMk id="6" creationId="{52240F4B-008E-4DE4-9FC2-1C6A0D0A4BE8}"/>
+          </ac:spMkLst>
+        </pc:spChg>
+        <pc:spChg chg="mod">
+          <ac:chgData name="Keerti Gurung" userId="e2354b7e34d2f498" providerId="LiveId" clId="{003F203D-70B0-4059-9844-D7232372AAB9}" dt="2026-09-26T07:20:46.380" v="236" actId="13822"/>
+          <ac:spMkLst>
+            <pc:docMk/>
+            <pc:sldMk cId="3162001317" sldId="262"/>
+            <ac:spMk id="7" creationId="{272C3EAC-F53E-4D5A-BFA6-3DBC38E01378}"/>
+          </ac:spMkLst>
+        </pc:spChg>
+        <pc:spChg chg="mod">
+          <ac:chgData name="Keerti Gurung" userId="e2354b7e34d2f498" providerId="LiveId" clId="{003F203D-70B0-4059-9844-D7232372AAB9}" dt="2026-09-26T08:27:43.542" v="1008" actId="1076"/>
+          <ac:spMkLst>
+            <pc:docMk/>
+            <pc:sldMk cId="3162001317" sldId="262"/>
+            <ac:spMk id="8" creationId="{C9758D3E-8CE2-46EB-8C5E-BF1A59916744}"/>
+          </ac:spMkLst>
+        </pc:spChg>
+        <pc:spChg chg="mod">
+          <ac:chgData name="Keerti Gurung" userId="e2354b7e34d2f498" providerId="LiveId" clId="{003F203D-70B0-4059-9844-D7232372AAB9}" dt="2026-09-26T08:27:48.345" v="1009" actId="1076"/>
+          <ac:spMkLst>
+            <pc:docMk/>
+            <pc:sldMk cId="3162001317" sldId="262"/>
+            <ac:spMk id="9" creationId="{99119452-9C50-4083-ABB2-CB741E6E1F73}"/>
+          </ac:spMkLst>
+        </pc:spChg>
+        <pc:picChg chg="mod">
+          <ac:chgData name="Keerti Gurung" userId="e2354b7e34d2f498" providerId="LiveId" clId="{003F203D-70B0-4059-9844-D7232372AAB9}" dt="2026-09-26T08:28:06.421" v="1011" actId="1076"/>
+          <ac:picMkLst>
+            <pc:docMk/>
+            <pc:sldMk cId="3162001317" sldId="262"/>
+            <ac:picMk id="11" creationId="{86CFF4CD-8FA6-4C6E-B61B-290ACE3B52F7}"/>
+          </ac:picMkLst>
+        </pc:picChg>
       </pc:sldChg>
     </pc:docChg>
   </pc:docChgLst>
@@ -300,7 +591,7 @@
           <a:p>
             <a:fld id="{683509AE-8639-4C23-B8E7-CA9382F03BD0}" type="datetimeFigureOut">
               <a:rPr lang="en-GB" smtClean="0"/>
-              <a:t>22/09/2026</a:t>
+              <a:t>26/09/2026</a:t>
             </a:fld>
             <a:endParaRPr lang="en-GB"/>
           </a:p>
@@ -500,7 +791,7 @@
           <a:p>
             <a:fld id="{683509AE-8639-4C23-B8E7-CA9382F03BD0}" type="datetimeFigureOut">
               <a:rPr lang="en-GB" smtClean="0"/>
-              <a:t>22/09/2026</a:t>
+              <a:t>26/09/2026</a:t>
             </a:fld>
             <a:endParaRPr lang="en-GB"/>
           </a:p>
@@ -710,7 +1001,7 @@
           <a:p>
             <a:fld id="{683509AE-8639-4C23-B8E7-CA9382F03BD0}" type="datetimeFigureOut">
               <a:rPr lang="en-GB" smtClean="0"/>
-              <a:t>22/09/2026</a:t>
+              <a:t>26/09/2026</a:t>
             </a:fld>
             <a:endParaRPr lang="en-GB"/>
           </a:p>
@@ -910,7 +1201,7 @@
           <a:p>
             <a:fld id="{683509AE-8639-4C23-B8E7-CA9382F03BD0}" type="datetimeFigureOut">
               <a:rPr lang="en-GB" smtClean="0"/>
-              <a:t>22/09/2026</a:t>
+              <a:t>26/09/2026</a:t>
             </a:fld>
             <a:endParaRPr lang="en-GB"/>
           </a:p>
@@ -1186,7 +1477,7 @@
           <a:p>
             <a:fld id="{683509AE-8639-4C23-B8E7-CA9382F03BD0}" type="datetimeFigureOut">
               <a:rPr lang="en-GB" smtClean="0"/>
-              <a:t>22/09/2026</a:t>
+              <a:t>26/09/2026</a:t>
             </a:fld>
             <a:endParaRPr lang="en-GB"/>
           </a:p>
@@ -1454,7 +1745,7 @@
           <a:p>
             <a:fld id="{683509AE-8639-4C23-B8E7-CA9382F03BD0}" type="datetimeFigureOut">
               <a:rPr lang="en-GB" smtClean="0"/>
-              <a:t>22/09/2026</a:t>
+              <a:t>26/09/2026</a:t>
             </a:fld>
             <a:endParaRPr lang="en-GB"/>
           </a:p>
@@ -1869,7 +2160,7 @@
           <a:p>
             <a:fld id="{683509AE-8639-4C23-B8E7-CA9382F03BD0}" type="datetimeFigureOut">
               <a:rPr lang="en-GB" smtClean="0"/>
-              <a:t>22/09/2026</a:t>
+              <a:t>26/09/2026</a:t>
             </a:fld>
             <a:endParaRPr lang="en-GB"/>
           </a:p>
@@ -2011,7 +2302,7 @@
           <a:p>
             <a:fld id="{683509AE-8639-4C23-B8E7-CA9382F03BD0}" type="datetimeFigureOut">
               <a:rPr lang="en-GB" smtClean="0"/>
-              <a:t>22/09/2026</a:t>
+              <a:t>26/09/2026</a:t>
             </a:fld>
             <a:endParaRPr lang="en-GB"/>
           </a:p>
@@ -2124,7 +2415,7 @@
           <a:p>
             <a:fld id="{683509AE-8639-4C23-B8E7-CA9382F03BD0}" type="datetimeFigureOut">
               <a:rPr lang="en-GB" smtClean="0"/>
-              <a:t>22/09/2026</a:t>
+              <a:t>26/09/2026</a:t>
             </a:fld>
             <a:endParaRPr lang="en-GB"/>
           </a:p>
@@ -2437,7 +2728,7 @@
           <a:p>
             <a:fld id="{683509AE-8639-4C23-B8E7-CA9382F03BD0}" type="datetimeFigureOut">
               <a:rPr lang="en-GB" smtClean="0"/>
-              <a:t>22/09/2026</a:t>
+              <a:t>26/09/2026</a:t>
             </a:fld>
             <a:endParaRPr lang="en-GB"/>
           </a:p>
@@ -2726,7 +3017,7 @@
           <a:p>
             <a:fld id="{683509AE-8639-4C23-B8E7-CA9382F03BD0}" type="datetimeFigureOut">
               <a:rPr lang="en-GB" smtClean="0"/>
-              <a:t>22/09/2026</a:t>
+              <a:t>26/09/2026</a:t>
             </a:fld>
             <a:endParaRPr lang="en-GB"/>
           </a:p>
@@ -2969,7 +3260,7 @@
           <a:p>
             <a:fld id="{683509AE-8639-4C23-B8E7-CA9382F03BD0}" type="datetimeFigureOut">
               <a:rPr lang="en-GB" smtClean="0"/>
-              <a:t>22/09/2026</a:t>
+              <a:t>26/09/2026</a:t>
             </a:fld>
             <a:endParaRPr lang="en-GB"/>
           </a:p>
@@ -3727,7 +4018,22 @@
             </a:pPr>
             <a:r>
               <a:rPr lang="en-GB" sz="2000" dirty="0"/>
-              <a:t>This analysis evaluates historical sales data from 2024-2025 to understand:</a:t>
+              <a:t>This analysis evaluates historical sales data of Wayfair E-Commerce Company from 2024-2025 to understand changes in sales and profitability, identify products and categories contributing to performance and examine the roles of returns and cancellations.</a:t>
+            </a:r>
+          </a:p>
+          <a:p>
+            <a:pPr marL="0" indent="0">
+              <a:buNone/>
+            </a:pPr>
+            <a:endParaRPr lang="en-GB" sz="2000" dirty="0"/>
+          </a:p>
+          <a:p>
+            <a:pPr marL="0" indent="0">
+              <a:buNone/>
+            </a:pPr>
+            <a:r>
+              <a:rPr lang="en-GB" sz="2000" dirty="0"/>
+              <a:t>Business Questions:</a:t>
             </a:r>
           </a:p>
           <a:p>
@@ -3829,29 +4135,29 @@
       </p:sp>
       <p:sp>
         <p:nvSpPr>
-          <p:cNvPr id="3" name="Content Placeholder 2">
-            <a:extLst>
-              <a:ext uri="{FF2B5EF4-FFF2-40B4-BE49-F238E27FC236}">
-                <a16:creationId xmlns:a16="http://schemas.microsoft.com/office/drawing/2014/main" id="{2B48E66E-38FA-4989-A8E2-ABA40C5B2822}"/>
-              </a:ext>
-            </a:extLst>
-          </p:cNvPr>
-          <p:cNvSpPr>
-            <a:spLocks noGrp="1"/>
-          </p:cNvSpPr>
-          <p:nvPr>
-            <p:ph sz="half" idx="1"/>
+          <p:cNvPr id="14" name="Content Placeholder 13">
+            <a:extLst>
+              <a:ext uri="{FF2B5EF4-FFF2-40B4-BE49-F238E27FC236}">
+                <a16:creationId xmlns:a16="http://schemas.microsoft.com/office/drawing/2014/main" id="{141B7ED8-3E2F-4C8D-9B70-29F4794794B3}"/>
+              </a:ext>
+            </a:extLst>
+          </p:cNvPr>
+          <p:cNvSpPr>
+            <a:spLocks noGrp="1"/>
+          </p:cNvSpPr>
+          <p:nvPr>
+            <p:ph idx="1"/>
           </p:nvPr>
         </p:nvSpPr>
         <p:spPr>
           <a:xfrm>
-            <a:off x="838200" y="1880052"/>
-            <a:ext cx="2495204" cy="463774"/>
+            <a:off x="838200" y="1770611"/>
+            <a:ext cx="10515600" cy="4406352"/>
           </a:xfrm>
         </p:spPr>
         <p:txBody>
           <a:bodyPr>
-            <a:normAutofit fontScale="92500" lnSpcReduction="10000"/>
+            <a:normAutofit/>
           </a:bodyPr>
           <a:lstStyle/>
           <a:p>
@@ -3860,81 +4166,7 @@
             </a:pPr>
             <a:r>
               <a:rPr lang="en-GB" sz="2000" dirty="0"/>
-              <a:t>Data overview</a:t>
-            </a:r>
-          </a:p>
-          <a:p>
-            <a:pPr marL="0" indent="0">
-              <a:buNone/>
-            </a:pPr>
-            <a:endParaRPr lang="en-GB" dirty="0"/>
-          </a:p>
-          <a:p>
-            <a:pPr marL="0" indent="0">
-              <a:buNone/>
-            </a:pPr>
-            <a:endParaRPr lang="en-GB" dirty="0"/>
-          </a:p>
-          <a:p>
-            <a:pPr marL="0" indent="0">
-              <a:buNone/>
-            </a:pPr>
-            <a:endParaRPr lang="en-GB" dirty="0"/>
-          </a:p>
-          <a:p>
-            <a:endParaRPr lang="en-GB" dirty="0"/>
-          </a:p>
-          <a:p>
-            <a:pPr marL="0" indent="0">
-              <a:buNone/>
-            </a:pPr>
-            <a:endParaRPr lang="en-GB" dirty="0"/>
-          </a:p>
-        </p:txBody>
-      </p:sp>
-      <p:sp>
-        <p:nvSpPr>
-          <p:cNvPr id="14" name="Content Placeholder 13">
-            <a:extLst>
-              <a:ext uri="{FF2B5EF4-FFF2-40B4-BE49-F238E27FC236}">
-                <a16:creationId xmlns:a16="http://schemas.microsoft.com/office/drawing/2014/main" id="{141B7ED8-3E2F-4C8D-9B70-29F4794794B3}"/>
-              </a:ext>
-            </a:extLst>
-          </p:cNvPr>
-          <p:cNvSpPr>
-            <a:spLocks noGrp="1"/>
-          </p:cNvSpPr>
-          <p:nvPr>
-            <p:ph sz="half" idx="2"/>
-          </p:nvPr>
-        </p:nvSpPr>
-        <p:spPr>
-          <a:xfrm>
-            <a:off x="838200" y="3895974"/>
-            <a:ext cx="10034850" cy="2153603"/>
-          </a:xfrm>
-        </p:spPr>
-        <p:txBody>
-          <a:bodyPr>
-            <a:normAutofit fontScale="92500" lnSpcReduction="10000"/>
-          </a:bodyPr>
-          <a:lstStyle/>
-          <a:p>
-            <a:pPr marL="0" indent="0">
-              <a:buNone/>
-            </a:pPr>
-            <a:r>
-              <a:rPr lang="en-GB" sz="2000" dirty="0"/>
-              <a:t>Analytical Workflow</a:t>
-            </a:r>
-          </a:p>
-          <a:p>
-            <a:pPr marL="0" indent="0">
-              <a:buNone/>
-            </a:pPr>
-            <a:r>
-              <a:rPr lang="en-GB" sz="2000" dirty="0"/>
-              <a:t>Raw Data → Data Cleaning → Exploratory Data Analysis → Data Modelling → KPI Definition → SQL Analysis → Power BI Dashboard → Insights &amp; Recommendations</a:t>
+              <a:t>DATASETS</a:t>
             </a:r>
           </a:p>
           <a:p>
@@ -3947,9 +4179,45 @@
             <a:pPr marL="0" indent="0">
               <a:buNone/>
             </a:pPr>
+            <a:endParaRPr lang="en-GB" sz="2000" dirty="0"/>
+          </a:p>
+          <a:p>
+            <a:pPr marL="0" indent="0">
+              <a:buNone/>
+            </a:pPr>
+            <a:endParaRPr lang="en-GB" sz="2000" dirty="0"/>
+          </a:p>
+          <a:p>
+            <a:pPr marL="0" indent="0">
+              <a:buNone/>
+            </a:pPr>
+            <a:endParaRPr lang="en-GB" sz="2000" dirty="0"/>
+          </a:p>
+          <a:p>
+            <a:pPr marL="0" indent="0">
+              <a:buNone/>
+            </a:pPr>
+            <a:endParaRPr lang="en-GB" sz="2000" dirty="0"/>
+          </a:p>
+          <a:p>
+            <a:pPr marL="0" indent="0">
+              <a:buNone/>
+            </a:pPr>
+            <a:endParaRPr lang="en-GB" sz="2000" dirty="0"/>
+          </a:p>
+          <a:p>
+            <a:pPr marL="0" indent="0">
+              <a:buNone/>
+            </a:pPr>
+            <a:endParaRPr lang="en-GB" sz="2000" dirty="0"/>
+          </a:p>
+          <a:p>
+            <a:pPr marL="0" indent="0">
+              <a:buNone/>
+            </a:pPr>
             <a:r>
               <a:rPr lang="en-GB" sz="2000" dirty="0"/>
-              <a:t>Tools Used:</a:t>
+              <a:t>ANALYTICAL WORKFLOW</a:t>
             </a:r>
           </a:p>
           <a:p>
@@ -3958,227 +4226,387 @@
             </a:pPr>
             <a:r>
               <a:rPr lang="en-GB" sz="2000" dirty="0"/>
-              <a:t>Python | PostgreSQL | SQL | Power BI</a:t>
-            </a:r>
-          </a:p>
-        </p:txBody>
-      </p:sp>
-      <p:sp>
-        <p:nvSpPr>
-          <p:cNvPr id="6" name="Rectangle: Rounded Corners 5">
-            <a:extLst>
-              <a:ext uri="{FF2B5EF4-FFF2-40B4-BE49-F238E27FC236}">
-                <a16:creationId xmlns:a16="http://schemas.microsoft.com/office/drawing/2014/main" id="{B65EA871-F84D-4B02-AA7F-5C2BDFC350EB}"/>
-              </a:ext>
-            </a:extLst>
-          </p:cNvPr>
-          <p:cNvSpPr/>
-          <p:nvPr/>
-        </p:nvSpPr>
-        <p:spPr>
-          <a:xfrm>
-            <a:off x="838200" y="2382890"/>
-            <a:ext cx="2212571" cy="1046110"/>
-          </a:xfrm>
-          <a:prstGeom prst="roundRect">
-            <a:avLst/>
-          </a:prstGeom>
-        </p:spPr>
-        <p:style>
-          <a:lnRef idx="2">
-            <a:schemeClr val="accent3"/>
-          </a:lnRef>
-          <a:fillRef idx="1">
-            <a:schemeClr val="lt1"/>
-          </a:fillRef>
-          <a:effectRef idx="0">
-            <a:schemeClr val="accent3"/>
-          </a:effectRef>
-          <a:fontRef idx="minor">
-            <a:schemeClr val="dk1"/>
-          </a:fontRef>
-        </p:style>
-        <p:txBody>
-          <a:bodyPr rtlCol="0" anchor="ctr"/>
-          <a:lstStyle/>
-          <a:p>
-            <a:pPr algn="ctr"/>
+              <a:t>Raw Data → Data Cleaning → Exploratory Data Analysis → Data Modelling → KPI </a:t>
+            </a:r>
+            <a:r>
+              <a:rPr lang="en-GB" sz="2000"/>
+              <a:t>Definition →</a:t>
+            </a:r>
+          </a:p>
+          <a:p>
+            <a:pPr marL="0" indent="0">
+              <a:buNone/>
+            </a:pPr>
+            <a:r>
+              <a:rPr lang="en-GB" sz="2000"/>
+              <a:t>SQL </a:t>
+            </a:r>
             <a:r>
               <a:rPr lang="en-GB" sz="2000" dirty="0"/>
-              <a:t>Customers</a:t>
-            </a:r>
-          </a:p>
-          <a:p>
-            <a:pPr algn="ctr"/>
-            <a:r>
-              <a:rPr lang="en-GB" sz="2400" dirty="0"/>
-              <a:t>3,600</a:t>
-            </a:r>
-          </a:p>
-        </p:txBody>
-      </p:sp>
-      <p:sp>
-        <p:nvSpPr>
-          <p:cNvPr id="7" name="Rectangle: Rounded Corners 6">
-            <a:extLst>
-              <a:ext uri="{FF2B5EF4-FFF2-40B4-BE49-F238E27FC236}">
-                <a16:creationId xmlns:a16="http://schemas.microsoft.com/office/drawing/2014/main" id="{BBA0F283-6DDC-40F8-AA5E-059B6358964D}"/>
-              </a:ext>
-            </a:extLst>
-          </p:cNvPr>
-          <p:cNvSpPr/>
-          <p:nvPr/>
-        </p:nvSpPr>
-        <p:spPr>
-          <a:xfrm>
-            <a:off x="3434541" y="2421954"/>
-            <a:ext cx="2212571" cy="1046110"/>
-          </a:xfrm>
-          <a:prstGeom prst="roundRect">
-            <a:avLst/>
-          </a:prstGeom>
-        </p:spPr>
-        <p:style>
-          <a:lnRef idx="2">
-            <a:schemeClr val="accent3"/>
-          </a:lnRef>
-          <a:fillRef idx="1">
-            <a:schemeClr val="lt1"/>
-          </a:fillRef>
-          <a:effectRef idx="0">
-            <a:schemeClr val="accent3"/>
-          </a:effectRef>
-          <a:fontRef idx="minor">
-            <a:schemeClr val="dk1"/>
-          </a:fontRef>
-        </p:style>
-        <p:txBody>
-          <a:bodyPr rtlCol="0" anchor="ctr"/>
-          <a:lstStyle/>
-          <a:p>
-            <a:pPr algn="ctr"/>
-            <a:r>
-              <a:rPr lang="en-GB" sz="2000" dirty="0"/>
-              <a:t>Products</a:t>
-            </a:r>
-          </a:p>
-          <a:p>
-            <a:pPr algn="ctr"/>
-            <a:r>
-              <a:rPr lang="en-GB" sz="2400" dirty="0"/>
-              <a:t>90</a:t>
-            </a:r>
-          </a:p>
-        </p:txBody>
-      </p:sp>
-      <p:sp>
-        <p:nvSpPr>
-          <p:cNvPr id="9" name="Rectangle: Rounded Corners 8">
-            <a:extLst>
-              <a:ext uri="{FF2B5EF4-FFF2-40B4-BE49-F238E27FC236}">
-                <a16:creationId xmlns:a16="http://schemas.microsoft.com/office/drawing/2014/main" id="{F3AB4831-6BD1-4AB0-99FE-BDD6AC5F7198}"/>
-              </a:ext>
-            </a:extLst>
-          </p:cNvPr>
-          <p:cNvSpPr/>
-          <p:nvPr/>
-        </p:nvSpPr>
-        <p:spPr>
-          <a:xfrm>
-            <a:off x="8660480" y="2379590"/>
-            <a:ext cx="2212570" cy="1088473"/>
-          </a:xfrm>
-          <a:prstGeom prst="roundRect">
-            <a:avLst/>
-          </a:prstGeom>
-        </p:spPr>
-        <p:style>
-          <a:lnRef idx="2">
-            <a:schemeClr val="accent3"/>
-          </a:lnRef>
-          <a:fillRef idx="1">
-            <a:schemeClr val="lt1"/>
-          </a:fillRef>
-          <a:effectRef idx="0">
-            <a:schemeClr val="accent3"/>
-          </a:effectRef>
-          <a:fontRef idx="minor">
-            <a:schemeClr val="dk1"/>
-          </a:fontRef>
-        </p:style>
-        <p:txBody>
-          <a:bodyPr rtlCol="0" anchor="ctr"/>
-          <a:lstStyle/>
-          <a:p>
-            <a:pPr algn="ctr"/>
-            <a:r>
-              <a:rPr lang="en-GB" sz="2000" dirty="0"/>
-              <a:t>Order Items</a:t>
-            </a:r>
-          </a:p>
-          <a:p>
-            <a:pPr algn="ctr"/>
-            <a:r>
-              <a:rPr lang="en-GB" sz="2400" dirty="0"/>
-              <a:t>15,409</a:t>
-            </a:r>
-          </a:p>
-        </p:txBody>
-      </p:sp>
-      <p:sp>
-        <p:nvSpPr>
-          <p:cNvPr id="10" name="Rectangle: Rounded Corners 9">
-            <a:extLst>
-              <a:ext uri="{FF2B5EF4-FFF2-40B4-BE49-F238E27FC236}">
-                <a16:creationId xmlns:a16="http://schemas.microsoft.com/office/drawing/2014/main" id="{1C453C4B-1402-4BBA-82A8-6181F4A183AC}"/>
-              </a:ext>
-            </a:extLst>
-          </p:cNvPr>
-          <p:cNvSpPr/>
-          <p:nvPr/>
-        </p:nvSpPr>
-        <p:spPr>
-          <a:xfrm>
-            <a:off x="6096000" y="2343826"/>
-            <a:ext cx="2212570" cy="1124238"/>
-          </a:xfrm>
-          <a:prstGeom prst="roundRect">
-            <a:avLst/>
-          </a:prstGeom>
-        </p:spPr>
-        <p:style>
-          <a:lnRef idx="2">
-            <a:schemeClr val="accent3"/>
-          </a:lnRef>
-          <a:fillRef idx="1">
-            <a:schemeClr val="lt1"/>
-          </a:fillRef>
-          <a:effectRef idx="0">
-            <a:schemeClr val="accent3"/>
-          </a:effectRef>
-          <a:fontRef idx="minor">
-            <a:schemeClr val="dk1"/>
-          </a:fontRef>
-        </p:style>
-        <p:txBody>
-          <a:bodyPr rtlCol="0" anchor="ctr"/>
-          <a:lstStyle/>
-          <a:p>
-            <a:pPr algn="ctr"/>
-            <a:r>
-              <a:rPr lang="en-GB" sz="2000" dirty="0"/>
-              <a:t>Orders</a:t>
-            </a:r>
-          </a:p>
-          <a:p>
-            <a:pPr algn="ctr"/>
-            <a:r>
-              <a:rPr lang="en-GB" sz="2400" dirty="0"/>
-              <a:t>9,207</a:t>
-            </a:r>
-          </a:p>
-        </p:txBody>
-      </p:sp>
+              <a:t>Analysis → Power BI Dashboard → Insights &amp; Recommendations</a:t>
+            </a:r>
+          </a:p>
+        </p:txBody>
+      </p:sp>
+      <p:graphicFrame>
+        <p:nvGraphicFramePr>
+          <p:cNvPr id="3" name="Table 3">
+            <a:extLst>
+              <a:ext uri="{FF2B5EF4-FFF2-40B4-BE49-F238E27FC236}">
+                <a16:creationId xmlns:a16="http://schemas.microsoft.com/office/drawing/2014/main" id="{A30C8665-A924-49B1-8678-5A845EE38EAF}"/>
+              </a:ext>
+            </a:extLst>
+          </p:cNvPr>
+          <p:cNvGraphicFramePr>
+            <a:graphicFrameLocks noGrp="1"/>
+          </p:cNvGraphicFramePr>
+          <p:nvPr>
+            <p:extLst>
+              <p:ext uri="{D42A27DB-BD31-4B8C-83A1-F6EECF244321}">
+                <p14:modId xmlns:p14="http://schemas.microsoft.com/office/powerpoint/2010/main" val="765040762"/>
+              </p:ext>
+            </p:extLst>
+          </p:nvPr>
+        </p:nvGraphicFramePr>
+        <p:xfrm>
+          <a:off x="914400" y="2100580"/>
+          <a:ext cx="9526388" cy="2656840"/>
+        </p:xfrm>
+        <a:graphic>
+          <a:graphicData uri="http://schemas.openxmlformats.org/drawingml/2006/table">
+            <a:tbl>
+              <a:tblPr firstRow="1" bandRow="1">
+                <a:tableStyleId>{69CF1AB2-1976-4502-BF36-3FF5EA218861}</a:tableStyleId>
+              </a:tblPr>
+              <a:tblGrid>
+                <a:gridCol w="1562793">
+                  <a:extLst>
+                    <a:ext uri="{9D8B030D-6E8A-4147-A177-3AD203B41FA5}">
+                      <a16:colId xmlns:a16="http://schemas.microsoft.com/office/drawing/2014/main" val="3736096802"/>
+                    </a:ext>
+                  </a:extLst>
+                </a:gridCol>
+                <a:gridCol w="1379912">
+                  <a:extLst>
+                    <a:ext uri="{9D8B030D-6E8A-4147-A177-3AD203B41FA5}">
+                      <a16:colId xmlns:a16="http://schemas.microsoft.com/office/drawing/2014/main" val="238874095"/>
+                    </a:ext>
+                  </a:extLst>
+                </a:gridCol>
+                <a:gridCol w="2801390">
+                  <a:extLst>
+                    <a:ext uri="{9D8B030D-6E8A-4147-A177-3AD203B41FA5}">
+                      <a16:colId xmlns:a16="http://schemas.microsoft.com/office/drawing/2014/main" val="735768114"/>
+                    </a:ext>
+                  </a:extLst>
+                </a:gridCol>
+                <a:gridCol w="3782293">
+                  <a:extLst>
+                    <a:ext uri="{9D8B030D-6E8A-4147-A177-3AD203B41FA5}">
+                      <a16:colId xmlns:a16="http://schemas.microsoft.com/office/drawing/2014/main" val="2957723152"/>
+                    </a:ext>
+                  </a:extLst>
+                </a:gridCol>
+              </a:tblGrid>
+              <a:tr h="325693">
+                <a:tc>
+                  <a:txBody>
+                    <a:bodyPr/>
+                    <a:lstStyle/>
+                    <a:p>
+                      <a:r>
+                        <a:rPr lang="en-GB" sz="1800" dirty="0"/>
+                        <a:t>Dataset</a:t>
+                      </a:r>
+                    </a:p>
+                  </a:txBody>
+                  <a:tcPr/>
+                </a:tc>
+                <a:tc>
+                  <a:txBody>
+                    <a:bodyPr/>
+                    <a:lstStyle/>
+                    <a:p>
+                      <a:r>
+                        <a:rPr lang="en-GB" sz="1800" dirty="0"/>
+                        <a:t>Records</a:t>
+                      </a:r>
+                    </a:p>
+                  </a:txBody>
+                  <a:tcPr/>
+                </a:tc>
+                <a:tc>
+                  <a:txBody>
+                    <a:bodyPr/>
+                    <a:lstStyle/>
+                    <a:p>
+                      <a:r>
+                        <a:rPr lang="en-GB" sz="1800" dirty="0"/>
+                        <a:t>Grain</a:t>
+                      </a:r>
+                    </a:p>
+                  </a:txBody>
+                  <a:tcPr/>
+                </a:tc>
+                <a:tc>
+                  <a:txBody>
+                    <a:bodyPr/>
+                    <a:lstStyle/>
+                    <a:p>
+                      <a:r>
+                        <a:rPr lang="en-GB" sz="1800" dirty="0"/>
+                        <a:t>Purpose</a:t>
+                      </a:r>
+                    </a:p>
+                  </a:txBody>
+                  <a:tcPr/>
+                </a:tc>
+                <a:extLst>
+                  <a:ext uri="{0D108BD9-81ED-4DB2-BD59-A6C34878D82A}">
+                    <a16:rowId xmlns:a16="http://schemas.microsoft.com/office/drawing/2014/main" val="704238893"/>
+                  </a:ext>
+                </a:extLst>
+              </a:tr>
+              <a:tr h="370840">
+                <a:tc>
+                  <a:txBody>
+                    <a:bodyPr/>
+                    <a:lstStyle/>
+                    <a:p>
+                      <a:r>
+                        <a:rPr lang="en-GB" sz="1800" dirty="0"/>
+                        <a:t>Customers</a:t>
+                      </a:r>
+                    </a:p>
+                  </a:txBody>
+                  <a:tcPr/>
+                </a:tc>
+                <a:tc>
+                  <a:txBody>
+                    <a:bodyPr/>
+                    <a:lstStyle/>
+                    <a:p>
+                      <a:r>
+                        <a:rPr lang="en-GB" sz="1800" dirty="0"/>
+                        <a:t>3,600</a:t>
+                      </a:r>
+                    </a:p>
+                  </a:txBody>
+                  <a:tcPr/>
+                </a:tc>
+                <a:tc>
+                  <a:txBody>
+                    <a:bodyPr/>
+                    <a:lstStyle/>
+                    <a:p>
+                      <a:r>
+                        <a:rPr lang="en-GB" sz="1800" dirty="0"/>
+                        <a:t>One row per customer</a:t>
+                      </a:r>
+                    </a:p>
+                  </a:txBody>
+                  <a:tcPr/>
+                </a:tc>
+                <a:tc>
+                  <a:txBody>
+                    <a:bodyPr/>
+                    <a:lstStyle/>
+                    <a:p>
+                      <a:r>
+                        <a:rPr lang="en-GB" sz="1800" dirty="0"/>
+                        <a:t>Customer and acquisition information</a:t>
+                      </a:r>
+                    </a:p>
+                  </a:txBody>
+                  <a:tcPr/>
+                </a:tc>
+                <a:extLst>
+                  <a:ext uri="{0D108BD9-81ED-4DB2-BD59-A6C34878D82A}">
+                    <a16:rowId xmlns:a16="http://schemas.microsoft.com/office/drawing/2014/main" val="3711037013"/>
+                  </a:ext>
+                </a:extLst>
+              </a:tr>
+              <a:tr h="370840">
+                <a:tc>
+                  <a:txBody>
+                    <a:bodyPr/>
+                    <a:lstStyle/>
+                    <a:p>
+                      <a:r>
+                        <a:rPr lang="en-GB" sz="1800" dirty="0"/>
+                        <a:t>Products</a:t>
+                      </a:r>
+                    </a:p>
+                  </a:txBody>
+                  <a:tcPr/>
+                </a:tc>
+                <a:tc>
+                  <a:txBody>
+                    <a:bodyPr/>
+                    <a:lstStyle/>
+                    <a:p>
+                      <a:r>
+                        <a:rPr lang="en-GB" sz="1800" dirty="0"/>
+                        <a:t>90</a:t>
+                      </a:r>
+                    </a:p>
+                  </a:txBody>
+                  <a:tcPr/>
+                </a:tc>
+                <a:tc>
+                  <a:txBody>
+                    <a:bodyPr/>
+                    <a:lstStyle/>
+                    <a:p>
+                      <a:r>
+                        <a:rPr lang="en-GB" sz="1800" dirty="0"/>
+                        <a:t>One row per product</a:t>
+                      </a:r>
+                    </a:p>
+                  </a:txBody>
+                  <a:tcPr/>
+                </a:tc>
+                <a:tc>
+                  <a:txBody>
+                    <a:bodyPr/>
+                    <a:lstStyle/>
+                    <a:p>
+                      <a:r>
+                        <a:rPr lang="en-GB" sz="1800" dirty="0"/>
+                        <a:t>Product, category, price and cost information</a:t>
+                      </a:r>
+                    </a:p>
+                  </a:txBody>
+                  <a:tcPr/>
+                </a:tc>
+                <a:extLst>
+                  <a:ext uri="{0D108BD9-81ED-4DB2-BD59-A6C34878D82A}">
+                    <a16:rowId xmlns:a16="http://schemas.microsoft.com/office/drawing/2014/main" val="1143038414"/>
+                  </a:ext>
+                </a:extLst>
+              </a:tr>
+              <a:tr h="370840">
+                <a:tc>
+                  <a:txBody>
+                    <a:bodyPr/>
+                    <a:lstStyle/>
+                    <a:p>
+                      <a:r>
+                        <a:rPr lang="en-GB" sz="1800" dirty="0"/>
+                        <a:t>Orders</a:t>
+                      </a:r>
+                    </a:p>
+                  </a:txBody>
+                  <a:tcPr/>
+                </a:tc>
+                <a:tc>
+                  <a:txBody>
+                    <a:bodyPr/>
+                    <a:lstStyle/>
+                    <a:p>
+                      <a:r>
+                        <a:rPr lang="en-GB" sz="1800" dirty="0"/>
+                        <a:t>9,207</a:t>
+                      </a:r>
+                    </a:p>
+                  </a:txBody>
+                  <a:tcPr/>
+                </a:tc>
+                <a:tc>
+                  <a:txBody>
+                    <a:bodyPr/>
+                    <a:lstStyle/>
+                    <a:p>
+                      <a:r>
+                        <a:rPr lang="en-GB" sz="1800" dirty="0"/>
+                        <a:t>One row per order</a:t>
+                      </a:r>
+                    </a:p>
+                  </a:txBody>
+                  <a:tcPr/>
+                </a:tc>
+                <a:tc>
+                  <a:txBody>
+                    <a:bodyPr/>
+                    <a:lstStyle/>
+                    <a:p>
+                      <a:r>
+                        <a:rPr lang="en-GB" sz="1800" dirty="0"/>
+                        <a:t>Order dates, status, payment, discounts and shipping</a:t>
+                      </a:r>
+                    </a:p>
+                  </a:txBody>
+                  <a:tcPr/>
+                </a:tc>
+                <a:extLst>
+                  <a:ext uri="{0D108BD9-81ED-4DB2-BD59-A6C34878D82A}">
+                    <a16:rowId xmlns:a16="http://schemas.microsoft.com/office/drawing/2014/main" val="4279538321"/>
+                  </a:ext>
+                </a:extLst>
+              </a:tr>
+              <a:tr h="370840">
+                <a:tc>
+                  <a:txBody>
+                    <a:bodyPr/>
+                    <a:lstStyle/>
+                    <a:p>
+                      <a:r>
+                        <a:rPr lang="en-GB" sz="1800" dirty="0"/>
+                        <a:t>Order items</a:t>
+                      </a:r>
+                    </a:p>
+                  </a:txBody>
+                  <a:tcPr/>
+                </a:tc>
+                <a:tc>
+                  <a:txBody>
+                    <a:bodyPr/>
+                    <a:lstStyle/>
+                    <a:p>
+                      <a:r>
+                        <a:rPr lang="en-GB" sz="1800" dirty="0"/>
+                        <a:t>15,409</a:t>
+                      </a:r>
+                    </a:p>
+                  </a:txBody>
+                  <a:tcPr/>
+                </a:tc>
+                <a:tc>
+                  <a:txBody>
+                    <a:bodyPr/>
+                    <a:lstStyle/>
+                    <a:p>
+                      <a:r>
+                        <a:rPr lang="en-GB" sz="1800" dirty="0"/>
+                        <a:t>One row per product one within an order</a:t>
+                      </a:r>
+                    </a:p>
+                  </a:txBody>
+                  <a:tcPr/>
+                </a:tc>
+                <a:tc>
+                  <a:txBody>
+                    <a:bodyPr/>
+                    <a:lstStyle/>
+                    <a:p>
+                      <a:r>
+                        <a:rPr lang="en-GB" sz="1800" dirty="0"/>
+                        <a:t>Product-level transaction details</a:t>
+                      </a:r>
+                    </a:p>
+                  </a:txBody>
+                  <a:tcPr/>
+                </a:tc>
+                <a:extLst>
+                  <a:ext uri="{0D108BD9-81ED-4DB2-BD59-A6C34878D82A}">
+                    <a16:rowId xmlns:a16="http://schemas.microsoft.com/office/drawing/2014/main" val="2698887113"/>
+                  </a:ext>
+                </a:extLst>
+              </a:tr>
+            </a:tbl>
+          </a:graphicData>
+        </a:graphic>
+      </p:graphicFrame>
     </p:spTree>
     <p:extLst>
       <p:ext uri="{BB962C8B-B14F-4D97-AF65-F5344CB8AC3E}">
@@ -4427,8 +4855,8 @@
         </p:nvSpPr>
         <p:spPr>
           <a:xfrm>
-            <a:off x="4573425" y="4852276"/>
-            <a:ext cx="6238621" cy="1504604"/>
+            <a:off x="7315199" y="1838594"/>
+            <a:ext cx="3882045" cy="3963689"/>
           </a:xfrm>
         </p:spPr>
         <p:txBody>
@@ -4470,7 +4898,63 @@
             <a:pPr marL="0" indent="0">
               <a:buNone/>
             </a:pPr>
-            <a:endParaRPr lang="en-GB" dirty="0"/>
+            <a:endParaRPr lang="en-GB" sz="2200" dirty="0"/>
+          </a:p>
+          <a:p>
+            <a:pPr marL="0" indent="0">
+              <a:buNone/>
+            </a:pPr>
+            <a:r>
+              <a:rPr lang="en-GB" sz="2200" dirty="0"/>
+              <a:t>Yearly Pattern</a:t>
+            </a:r>
+          </a:p>
+          <a:p>
+            <a:pPr marL="0" indent="0">
+              <a:buNone/>
+            </a:pPr>
+            <a:r>
+              <a:rPr lang="en-GB" sz="2000" dirty="0"/>
+              <a:t>Revenue - </a:t>
+            </a:r>
+            <a:r>
+              <a:rPr lang="en-GB" sz="2200" dirty="0"/>
+              <a:t>$926.5K → $1.12M</a:t>
+            </a:r>
+          </a:p>
+          <a:p>
+            <a:pPr marL="0" indent="0">
+              <a:buNone/>
+            </a:pPr>
+            <a:r>
+              <a:rPr lang="en-GB" sz="2200" dirty="0"/>
+              <a:t>Profit - $442.4K → $564.8K</a:t>
+            </a:r>
+          </a:p>
+          <a:p>
+            <a:pPr marL="0" indent="0">
+              <a:buNone/>
+            </a:pPr>
+            <a:r>
+              <a:rPr lang="en-US" sz="2200" dirty="0"/>
+              <a:t>Revenue +21.0% </a:t>
+            </a:r>
+          </a:p>
+          <a:p>
+            <a:pPr marL="0" indent="0">
+              <a:buNone/>
+            </a:pPr>
+            <a:r>
+              <a:rPr lang="en-US" sz="2200" dirty="0"/>
+              <a:t>Profit +27.7%</a:t>
+            </a:r>
+            <a:endParaRPr lang="en-GB" sz="2200" dirty="0"/>
+          </a:p>
+          <a:p>
+            <a:pPr marL="0" indent="0">
+              <a:buNone/>
+            </a:pPr>
+            <a:endParaRPr lang="en-GB" sz="2800" dirty="0"/>
           </a:p>
           <a:p>
             <a:pPr marL="0" indent="0">
@@ -4520,177 +5004,11 @@
             </a:pPr>
             <a:endParaRPr lang="en-GB" dirty="0"/>
           </a:p>
-        </p:txBody>
-      </p:sp>
-      <p:sp>
-        <p:nvSpPr>
-          <p:cNvPr id="10" name="Content Placeholder 9">
-            <a:extLst>
-              <a:ext uri="{FF2B5EF4-FFF2-40B4-BE49-F238E27FC236}">
-                <a16:creationId xmlns:a16="http://schemas.microsoft.com/office/drawing/2014/main" id="{A372BB4B-3216-41D8-80BE-75F469586810}"/>
-              </a:ext>
-            </a:extLst>
-          </p:cNvPr>
-          <p:cNvSpPr>
-            <a:spLocks noGrp="1"/>
-          </p:cNvSpPr>
-          <p:nvPr>
-            <p:ph sz="half" idx="1"/>
-          </p:nvPr>
-        </p:nvSpPr>
-        <p:spPr>
-          <a:xfrm>
-            <a:off x="838200" y="1730135"/>
-            <a:ext cx="2786149" cy="1013065"/>
-          </a:xfrm>
-          <a:prstGeom prst="roundRect">
-            <a:avLst/>
-          </a:prstGeom>
-        </p:spPr>
-        <p:style>
-          <a:lnRef idx="2">
-            <a:schemeClr val="accent5"/>
-          </a:lnRef>
-          <a:fillRef idx="1">
-            <a:schemeClr val="lt1"/>
-          </a:fillRef>
-          <a:effectRef idx="0">
-            <a:schemeClr val="accent5"/>
-          </a:effectRef>
-          <a:fontRef idx="minor">
-            <a:schemeClr val="dk1"/>
-          </a:fontRef>
-        </p:style>
-        <p:txBody>
-          <a:bodyPr rtlCol="0" anchor="ctr">
-            <a:normAutofit fontScale="92500" lnSpcReduction="10000"/>
-          </a:bodyPr>
-          <a:lstStyle/>
-          <a:p>
-            <a:pPr marL="0" indent="0" algn="ctr">
+          <a:p>
+            <a:pPr marL="0" indent="0">
               <a:buNone/>
             </a:pPr>
-            <a:r>
-              <a:rPr lang="en-GB" sz="2200" dirty="0"/>
-              <a:t>Revenue</a:t>
-            </a:r>
-          </a:p>
-          <a:p>
-            <a:pPr marL="0" indent="0" algn="ctr">
-              <a:buNone/>
-            </a:pPr>
-            <a:r>
-              <a:rPr lang="en-GB" sz="2600" dirty="0"/>
-              <a:t>$926.5K → $1.12M</a:t>
-            </a:r>
-          </a:p>
-        </p:txBody>
-      </p:sp>
-      <p:sp>
-        <p:nvSpPr>
-          <p:cNvPr id="11" name="Rectangle: Rounded Corners 10">
-            <a:extLst>
-              <a:ext uri="{FF2B5EF4-FFF2-40B4-BE49-F238E27FC236}">
-                <a16:creationId xmlns:a16="http://schemas.microsoft.com/office/drawing/2014/main" id="{6A2F1DA0-0748-43BD-B738-A37CF5E0BEC5}"/>
-              </a:ext>
-            </a:extLst>
-          </p:cNvPr>
-          <p:cNvSpPr/>
-          <p:nvPr/>
-        </p:nvSpPr>
-        <p:spPr>
-          <a:xfrm>
-            <a:off x="838200" y="3032467"/>
-            <a:ext cx="2786149" cy="1013065"/>
-          </a:xfrm>
-          <a:prstGeom prst="roundRect">
-            <a:avLst/>
-          </a:prstGeom>
-        </p:spPr>
-        <p:style>
-          <a:lnRef idx="2">
-            <a:schemeClr val="accent5"/>
-          </a:lnRef>
-          <a:fillRef idx="1">
-            <a:schemeClr val="lt1"/>
-          </a:fillRef>
-          <a:effectRef idx="0">
-            <a:schemeClr val="accent5"/>
-          </a:effectRef>
-          <a:fontRef idx="minor">
-            <a:schemeClr val="dk1"/>
-          </a:fontRef>
-        </p:style>
-        <p:txBody>
-          <a:bodyPr rtlCol="0" anchor="ctr"/>
-          <a:lstStyle/>
-          <a:p>
-            <a:pPr algn="ctr"/>
-            <a:r>
-              <a:rPr lang="en-GB" sz="2000" dirty="0"/>
-              <a:t>Profit</a:t>
-            </a:r>
-          </a:p>
-          <a:p>
-            <a:pPr algn="ctr"/>
-            <a:r>
-              <a:rPr lang="en-GB" sz="2400" dirty="0"/>
-              <a:t>$442.4K → $564.8K</a:t>
-            </a:r>
-          </a:p>
-        </p:txBody>
-      </p:sp>
-      <p:sp>
-        <p:nvSpPr>
-          <p:cNvPr id="12" name="Rectangle: Rounded Corners 11">
-            <a:extLst>
-              <a:ext uri="{FF2B5EF4-FFF2-40B4-BE49-F238E27FC236}">
-                <a16:creationId xmlns:a16="http://schemas.microsoft.com/office/drawing/2014/main" id="{81F87F97-2E12-4EEE-B4AA-D3E49B4A083D}"/>
-              </a:ext>
-            </a:extLst>
-          </p:cNvPr>
-          <p:cNvSpPr/>
-          <p:nvPr/>
-        </p:nvSpPr>
-        <p:spPr>
-          <a:xfrm>
-            <a:off x="838201" y="4289911"/>
-            <a:ext cx="2786148" cy="1013066"/>
-          </a:xfrm>
-          <a:prstGeom prst="roundRect">
-            <a:avLst/>
-          </a:prstGeom>
-        </p:spPr>
-        <p:style>
-          <a:lnRef idx="2">
-            <a:schemeClr val="accent5"/>
-          </a:lnRef>
-          <a:fillRef idx="1">
-            <a:schemeClr val="lt1"/>
-          </a:fillRef>
-          <a:effectRef idx="0">
-            <a:schemeClr val="accent5"/>
-          </a:effectRef>
-          <a:fontRef idx="minor">
-            <a:schemeClr val="dk1"/>
-          </a:fontRef>
-        </p:style>
-        <p:txBody>
-          <a:bodyPr rtlCol="0" anchor="ctr"/>
-          <a:lstStyle/>
-          <a:p>
-            <a:pPr algn="ctr"/>
-            <a:r>
-              <a:rPr lang="en-GB" sz="2000" dirty="0"/>
-              <a:t>Profit Margin</a:t>
-            </a:r>
-          </a:p>
-          <a:p>
-            <a:pPr algn="ctr"/>
-            <a:r>
-              <a:rPr lang="en-GB" sz="2400" dirty="0"/>
-              <a:t>47.75% → 50.39%</a:t>
-            </a:r>
+            <a:endParaRPr lang="en-GB" dirty="0"/>
           </a:p>
         </p:txBody>
       </p:sp>
@@ -4716,73 +5034,14 @@
         </p:blipFill>
         <p:spPr>
           <a:xfrm>
-            <a:off x="4573424" y="1643101"/>
-            <a:ext cx="6238621" cy="3153343"/>
+            <a:off x="807803" y="1720894"/>
+            <a:ext cx="6238621" cy="3540423"/>
           </a:xfrm>
           <a:prstGeom prst="rect">
             <a:avLst/>
           </a:prstGeom>
         </p:spPr>
       </p:pic>
-      <p:sp>
-        <p:nvSpPr>
-          <p:cNvPr id="15" name="Rectangle: Rounded Corners 14">
-            <a:extLst>
-              <a:ext uri="{FF2B5EF4-FFF2-40B4-BE49-F238E27FC236}">
-                <a16:creationId xmlns:a16="http://schemas.microsoft.com/office/drawing/2014/main" id="{640E721F-2559-41AC-B746-C3798032FD90}"/>
-              </a:ext>
-            </a:extLst>
-          </p:cNvPr>
-          <p:cNvSpPr/>
-          <p:nvPr/>
-        </p:nvSpPr>
-        <p:spPr>
-          <a:xfrm>
-            <a:off x="838201" y="5580607"/>
-            <a:ext cx="2786148" cy="1013066"/>
-          </a:xfrm>
-          <a:prstGeom prst="roundRect">
-            <a:avLst/>
-          </a:prstGeom>
-        </p:spPr>
-        <p:style>
-          <a:lnRef idx="2">
-            <a:schemeClr val="accent5"/>
-          </a:lnRef>
-          <a:fillRef idx="1">
-            <a:schemeClr val="lt1"/>
-          </a:fillRef>
-          <a:effectRef idx="0">
-            <a:schemeClr val="accent5"/>
-          </a:effectRef>
-          <a:fontRef idx="minor">
-            <a:schemeClr val="dk1"/>
-          </a:fontRef>
-        </p:style>
-        <p:txBody>
-          <a:bodyPr rtlCol="0" anchor="ctr"/>
-          <a:lstStyle/>
-          <a:p>
-            <a:pPr algn="ctr"/>
-            <a:r>
-              <a:rPr lang="en-GB" sz="2000" dirty="0"/>
-              <a:t>2024 </a:t>
-            </a:r>
-            <a:r>
-              <a:rPr lang="en-US" sz="2000" dirty="0"/>
-              <a:t>→ 2025 Growth</a:t>
-            </a:r>
-          </a:p>
-          <a:p>
-            <a:pPr algn="ctr"/>
-            <a:r>
-              <a:rPr lang="en-US" sz="2400" dirty="0"/>
-              <a:t>Revenue +21.0%  Profit +27.7%</a:t>
-            </a:r>
-            <a:endParaRPr lang="en-GB" sz="2400" dirty="0"/>
-          </a:p>
-        </p:txBody>
-      </p:sp>
     </p:spTree>
     <p:extLst>
       <p:ext uri="{BB962C8B-B14F-4D97-AF65-F5344CB8AC3E}">
@@ -4917,22 +5176,26 @@
         </p:nvSpPr>
         <p:spPr>
           <a:xfrm>
-            <a:off x="838200" y="5265131"/>
-            <a:ext cx="3167149" cy="1055716"/>
+            <a:off x="746762" y="4938008"/>
+            <a:ext cx="3259974" cy="1017327"/>
           </a:xfrm>
           <a:prstGeom prst="roundRect">
             <a:avLst/>
           </a:prstGeom>
+          <a:noFill/>
+          <a:ln>
+            <a:noFill/>
+          </a:ln>
         </p:spPr>
         <p:style>
-          <a:lnRef idx="2">
-            <a:schemeClr val="accent5"/>
+          <a:lnRef idx="0">
+            <a:scrgbClr r="0" g="0" b="0"/>
           </a:lnRef>
-          <a:fillRef idx="1">
-            <a:schemeClr val="lt1"/>
+          <a:fillRef idx="0">
+            <a:scrgbClr r="0" g="0" b="0"/>
           </a:fillRef>
           <a:effectRef idx="0">
-            <a:schemeClr val="accent5"/>
+            <a:scrgbClr r="0" g="0" b="0"/>
           </a:effectRef>
           <a:fontRef idx="minor">
             <a:schemeClr val="dk1"/>
@@ -4942,21 +5205,18 @@
           <a:bodyPr rtlCol="0" anchor="ctr"/>
           <a:lstStyle/>
           <a:p>
-            <a:pPr algn="ctr"/>
             <a:r>
               <a:rPr lang="en-GB" sz="2000" dirty="0"/>
               <a:t>Top Category: Furniture</a:t>
             </a:r>
           </a:p>
           <a:p>
-            <a:pPr algn="ctr"/>
             <a:r>
               <a:rPr lang="en-GB" sz="2000" dirty="0"/>
               <a:t>Revenue: $367.9K</a:t>
             </a:r>
           </a:p>
           <a:p>
-            <a:pPr algn="ctr"/>
             <a:r>
               <a:rPr lang="en-GB" sz="2000" dirty="0"/>
               <a:t>Profit: $170.3K</a:t>
@@ -4978,22 +5238,26 @@
         </p:nvSpPr>
         <p:spPr>
           <a:xfrm>
-            <a:off x="6248400" y="5275907"/>
+            <a:off x="6248400" y="4932871"/>
             <a:ext cx="3676996" cy="1055716"/>
           </a:xfrm>
           <a:prstGeom prst="roundRect">
             <a:avLst/>
           </a:prstGeom>
+          <a:noFill/>
+          <a:ln>
+            <a:noFill/>
+          </a:ln>
         </p:spPr>
         <p:style>
-          <a:lnRef idx="2">
-            <a:schemeClr val="accent5"/>
+          <a:lnRef idx="0">
+            <a:scrgbClr r="0" g="0" b="0"/>
           </a:lnRef>
-          <a:fillRef idx="1">
-            <a:schemeClr val="lt1"/>
+          <a:fillRef idx="0">
+            <a:scrgbClr r="0" g="0" b="0"/>
           </a:fillRef>
           <a:effectRef idx="0">
-            <a:schemeClr val="accent5"/>
+            <a:scrgbClr r="0" g="0" b="0"/>
           </a:effectRef>
           <a:fontRef idx="minor">
             <a:schemeClr val="dk1"/>
@@ -5003,21 +5267,18 @@
           <a:bodyPr rtlCol="0" anchor="ctr"/>
           <a:lstStyle/>
           <a:p>
-            <a:pPr algn="ctr"/>
             <a:r>
               <a:rPr lang="en-GB" sz="2000" dirty="0"/>
               <a:t>Top Product: Cotton Patio Chair</a:t>
             </a:r>
           </a:p>
           <a:p>
-            <a:pPr algn="ctr"/>
             <a:r>
               <a:rPr lang="en-GB" sz="2000" dirty="0"/>
               <a:t>Revenue: $74.5K</a:t>
             </a:r>
           </a:p>
           <a:p>
-            <a:pPr algn="ctr"/>
             <a:r>
               <a:rPr lang="en-GB" sz="2000" dirty="0"/>
               <a:t>Profit: $33.3K</a:t>
@@ -5111,7 +5372,7 @@
         </p:spPr>
         <p:txBody>
           <a:bodyPr>
-            <a:normAutofit fontScale="92500" lnSpcReduction="20000"/>
+            <a:normAutofit fontScale="92500" lnSpcReduction="10000"/>
           </a:bodyPr>
           <a:lstStyle/>
           <a:p>
@@ -5179,13 +5440,13 @@
         </p:nvSpPr>
         <p:spPr>
           <a:xfrm>
-            <a:off x="5697219" y="5251506"/>
-            <a:ext cx="5181600" cy="1138289"/>
+            <a:off x="5188187" y="4913959"/>
+            <a:ext cx="5181600" cy="1205081"/>
           </a:xfrm>
         </p:spPr>
         <p:txBody>
           <a:bodyPr>
-            <a:normAutofit fontScale="92500" lnSpcReduction="20000"/>
+            <a:normAutofit fontScale="92500" lnSpcReduction="10000"/>
           </a:bodyPr>
           <a:lstStyle/>
           <a:p>
@@ -5230,14 +5491,14 @@
           </a:prstGeom>
         </p:spPr>
         <p:style>
-          <a:lnRef idx="2">
-            <a:schemeClr val="accent1"/>
+          <a:lnRef idx="1">
+            <a:schemeClr val="accent5"/>
           </a:lnRef>
-          <a:fillRef idx="1">
-            <a:schemeClr val="lt1"/>
+          <a:fillRef idx="2">
+            <a:schemeClr val="accent5"/>
           </a:fillRef>
-          <a:effectRef idx="0">
-            <a:schemeClr val="accent1"/>
+          <a:effectRef idx="1">
+            <a:schemeClr val="accent5"/>
           </a:effectRef>
           <a:fontRef idx="minor">
             <a:schemeClr val="dk1"/>
@@ -5284,14 +5545,14 @@
           </a:prstGeom>
         </p:spPr>
         <p:style>
-          <a:lnRef idx="2">
-            <a:schemeClr val="accent1"/>
+          <a:lnRef idx="1">
+            <a:schemeClr val="accent5"/>
           </a:lnRef>
-          <a:fillRef idx="1">
-            <a:schemeClr val="lt1"/>
+          <a:fillRef idx="2">
+            <a:schemeClr val="accent5"/>
           </a:fillRef>
-          <a:effectRef idx="0">
-            <a:schemeClr val="accent1"/>
+          <a:effectRef idx="1">
+            <a:schemeClr val="accent5"/>
           </a:effectRef>
           <a:fontRef idx="minor">
             <a:schemeClr val="dk1"/>
@@ -5338,14 +5599,14 @@
           </a:prstGeom>
         </p:spPr>
         <p:style>
-          <a:lnRef idx="2">
-            <a:schemeClr val="accent1"/>
+          <a:lnRef idx="1">
+            <a:schemeClr val="accent5"/>
           </a:lnRef>
-          <a:fillRef idx="1">
-            <a:schemeClr val="lt1"/>
+          <a:fillRef idx="2">
+            <a:schemeClr val="accent5"/>
           </a:fillRef>
-          <a:effectRef idx="0">
-            <a:schemeClr val="accent1"/>
+          <a:effectRef idx="1">
+            <a:schemeClr val="accent5"/>
           </a:effectRef>
           <a:fontRef idx="minor">
             <a:schemeClr val="dk1"/>
@@ -5384,7 +5645,7 @@
         </p:nvSpPr>
         <p:spPr>
           <a:xfrm>
-            <a:off x="3313775" y="2616893"/>
+            <a:off x="3036800" y="2616893"/>
             <a:ext cx="1921625" cy="812107"/>
           </a:xfrm>
           <a:prstGeom prst="roundRect">
@@ -5392,14 +5653,14 @@
           </a:prstGeom>
         </p:spPr>
         <p:style>
-          <a:lnRef idx="2">
-            <a:schemeClr val="accent1"/>
+          <a:lnRef idx="1">
+            <a:schemeClr val="accent5"/>
           </a:lnRef>
-          <a:fillRef idx="1">
-            <a:schemeClr val="lt1"/>
+          <a:fillRef idx="2">
+            <a:schemeClr val="accent5"/>
           </a:fillRef>
-          <a:effectRef idx="0">
-            <a:schemeClr val="accent1"/>
+          <a:effectRef idx="1">
+            <a:schemeClr val="accent5"/>
           </a:effectRef>
           <a:fontRef idx="minor">
             <a:schemeClr val="dk1"/>
@@ -5438,7 +5699,7 @@
         </p:nvSpPr>
         <p:spPr>
           <a:xfrm>
-            <a:off x="3313776" y="3743998"/>
+            <a:off x="3036567" y="3743999"/>
             <a:ext cx="1921624" cy="1019195"/>
           </a:xfrm>
           <a:prstGeom prst="roundRect">
@@ -5446,14 +5707,14 @@
           </a:prstGeom>
         </p:spPr>
         <p:style>
-          <a:lnRef idx="2">
-            <a:schemeClr val="accent1"/>
+          <a:lnRef idx="1">
+            <a:schemeClr val="accent5"/>
           </a:lnRef>
-          <a:fillRef idx="1">
-            <a:schemeClr val="lt1"/>
+          <a:fillRef idx="2">
+            <a:schemeClr val="accent5"/>
           </a:fillRef>
-          <a:effectRef idx="0">
-            <a:schemeClr val="accent1"/>
+          <a:effectRef idx="1">
+            <a:schemeClr val="accent5"/>
           </a:effectRef>
           <a:fontRef idx="minor">
             <a:schemeClr val="dk1"/>
@@ -5500,7 +5761,7 @@
         </p:blipFill>
         <p:spPr>
           <a:xfrm>
-            <a:off x="5636029" y="1794954"/>
+            <a:off x="5235166" y="1666350"/>
             <a:ext cx="6219334" cy="3455364"/>
           </a:xfrm>
           <a:prstGeom prst="rect">

--- a/presentation/WayFair E-commerce Analysis.pptx
+++ b/presentation/WayFair E-commerce Analysis.pptx
@@ -12,10 +12,9 @@
     <p:sldId id="260" r:id="rId6"/>
     <p:sldId id="261" r:id="rId7"/>
     <p:sldId id="262" r:id="rId8"/>
-    <p:sldId id="263" r:id="rId9"/>
-    <p:sldId id="264" r:id="rId10"/>
-    <p:sldId id="265" r:id="rId11"/>
-    <p:sldId id="266" r:id="rId12"/>
+    <p:sldId id="264" r:id="rId9"/>
+    <p:sldId id="265" r:id="rId10"/>
+    <p:sldId id="266" r:id="rId11"/>
   </p:sldIdLst>
   <p:sldSz cx="12192000" cy="6858000"/>
   <p:notesSz cx="6858000" cy="9144000"/>
@@ -126,17 +125,25 @@
 <pc:chgInfo xmlns:a="http://schemas.openxmlformats.org/drawingml/2006/main" xmlns:r="http://schemas.openxmlformats.org/officeDocument/2006/relationships" xmlns:ac="http://schemas.microsoft.com/office/drawing/2013/main/command" xmlns:pc="http://schemas.microsoft.com/office/powerpoint/2013/main/command">
   <pc:docChgLst>
     <pc:chgData name="Keerti Gurung" userId="e2354b7e34d2f498" providerId="LiveId" clId="{003F203D-70B0-4059-9844-D7232372AAB9}"/>
-    <pc:docChg chg="undo redo custSel modSld">
-      <pc:chgData name="Keerti Gurung" userId="e2354b7e34d2f498" providerId="LiveId" clId="{003F203D-70B0-4059-9844-D7232372AAB9}" dt="2026-09-26T08:28:18.501" v="1013" actId="1076"/>
+    <pc:docChg chg="undo redo custSel delSld modSld">
+      <pc:chgData name="Keerti Gurung" userId="e2354b7e34d2f498" providerId="LiveId" clId="{003F203D-70B0-4059-9844-D7232372AAB9}" dt="2026-09-26T08:53:28.875" v="1703" actId="2696"/>
       <pc:docMkLst>
         <pc:docMk/>
       </pc:docMkLst>
       <pc:sldChg chg="modSp mod">
-        <pc:chgData name="Keerti Gurung" userId="e2354b7e34d2f498" providerId="LiveId" clId="{003F203D-70B0-4059-9844-D7232372AAB9}" dt="2026-09-22T13:09:46.752" v="1" actId="122"/>
+        <pc:chgData name="Keerti Gurung" userId="e2354b7e34d2f498" providerId="LiveId" clId="{003F203D-70B0-4059-9844-D7232372AAB9}" dt="2026-09-26T08:51:58.851" v="1699" actId="255"/>
         <pc:sldMkLst>
           <pc:docMk/>
           <pc:sldMk cId="1858497084" sldId="256"/>
         </pc:sldMkLst>
+        <pc:spChg chg="mod">
+          <ac:chgData name="Keerti Gurung" userId="e2354b7e34d2f498" providerId="LiveId" clId="{003F203D-70B0-4059-9844-D7232372AAB9}" dt="2026-09-26T08:51:58.851" v="1699" actId="255"/>
+          <ac:spMkLst>
+            <pc:docMk/>
+            <pc:sldMk cId="1858497084" sldId="256"/>
+            <ac:spMk id="2" creationId="{F78CCD44-A660-46A2-825B-78A6EF8CAC79}"/>
+          </ac:spMkLst>
+        </pc:spChg>
         <pc:spChg chg="mod">
           <ac:chgData name="Keerti Gurung" userId="e2354b7e34d2f498" providerId="LiveId" clId="{003F203D-70B0-4059-9844-D7232372AAB9}" dt="2026-09-22T13:09:46.752" v="1" actId="122"/>
           <ac:spMkLst>
@@ -436,6 +443,28 @@
             <ac:picMk id="11" creationId="{86CFF4CD-8FA6-4C6E-B61B-290ACE3B52F7}"/>
           </ac:picMkLst>
         </pc:picChg>
+      </pc:sldChg>
+      <pc:sldChg chg="del">
+        <pc:chgData name="Keerti Gurung" userId="e2354b7e34d2f498" providerId="LiveId" clId="{003F203D-70B0-4059-9844-D7232372AAB9}" dt="2026-09-26T08:53:28.875" v="1703" actId="2696"/>
+        <pc:sldMkLst>
+          <pc:docMk/>
+          <pc:sldMk cId="3992826602" sldId="263"/>
+        </pc:sldMkLst>
+      </pc:sldChg>
+      <pc:sldChg chg="modSp mod">
+        <pc:chgData name="Keerti Gurung" userId="e2354b7e34d2f498" providerId="LiveId" clId="{003F203D-70B0-4059-9844-D7232372AAB9}" dt="2026-09-26T08:52:36.252" v="1702" actId="20577"/>
+        <pc:sldMkLst>
+          <pc:docMk/>
+          <pc:sldMk cId="1956836748" sldId="264"/>
+        </pc:sldMkLst>
+        <pc:spChg chg="mod">
+          <ac:chgData name="Keerti Gurung" userId="e2354b7e34d2f498" providerId="LiveId" clId="{003F203D-70B0-4059-9844-D7232372AAB9}" dt="2026-09-26T08:52:36.252" v="1702" actId="20577"/>
+          <ac:spMkLst>
+            <pc:docMk/>
+            <pc:sldMk cId="1956836748" sldId="264"/>
+            <ac:spMk id="3" creationId="{C1A11820-7CC3-434E-A6B8-E845AFB698D7}"/>
+          </ac:spMkLst>
+        </pc:spChg>
       </pc:sldChg>
     </pc:docChg>
   </pc:docChgLst>
@@ -3706,7 +3735,7 @@
           <a:lstStyle/>
           <a:p>
             <a:r>
-              <a:rPr lang="en-GB" sz="3200" b="1" dirty="0">
+              <a:rPr lang="en-GB" sz="4000" b="1" dirty="0">
                 <a:latin typeface="+mn-lt"/>
               </a:rPr>
               <a:t>Wayfair E-commerce Sales &amp; Profitability Analysis</a:t>
@@ -3782,118 +3811,6 @@
       </p:grpSpPr>
       <p:sp>
         <p:nvSpPr>
-          <p:cNvPr id="2" name="Title 1">
-            <a:extLst>
-              <a:ext uri="{FF2B5EF4-FFF2-40B4-BE49-F238E27FC236}">
-                <a16:creationId xmlns:a16="http://schemas.microsoft.com/office/drawing/2014/main" id="{856791FB-D5D8-4AAB-B9CB-3988A9EF0411}"/>
-              </a:ext>
-            </a:extLst>
-          </p:cNvPr>
-          <p:cNvSpPr>
-            <a:spLocks noGrp="1"/>
-          </p:cNvSpPr>
-          <p:nvPr>
-            <p:ph type="title"/>
-          </p:nvPr>
-        </p:nvSpPr>
-        <p:spPr/>
-        <p:txBody>
-          <a:bodyPr/>
-          <a:lstStyle/>
-          <a:p>
-            <a:r>
-              <a:rPr lang="en-GB" sz="3200" b="1" dirty="0">
-                <a:latin typeface="+mn-lt"/>
-              </a:rPr>
-              <a:t>Limitations</a:t>
-            </a:r>
-            <a:r>
-              <a:rPr lang="en-GB" dirty="0"/>
-              <a:t> </a:t>
-            </a:r>
-          </a:p>
-        </p:txBody>
-      </p:sp>
-      <p:sp>
-        <p:nvSpPr>
-          <p:cNvPr id="3" name="Content Placeholder 2">
-            <a:extLst>
-              <a:ext uri="{FF2B5EF4-FFF2-40B4-BE49-F238E27FC236}">
-                <a16:creationId xmlns:a16="http://schemas.microsoft.com/office/drawing/2014/main" id="{4420F9E1-BE3B-41D4-A11A-97EC2750AEF1}"/>
-              </a:ext>
-            </a:extLst>
-          </p:cNvPr>
-          <p:cNvSpPr>
-            <a:spLocks noGrp="1"/>
-          </p:cNvSpPr>
-          <p:nvPr>
-            <p:ph idx="1"/>
-          </p:nvPr>
-        </p:nvSpPr>
-        <p:spPr/>
-        <p:txBody>
-          <a:bodyPr>
-            <a:normAutofit/>
-          </a:bodyPr>
-          <a:lstStyle/>
-          <a:p>
-            <a:r>
-              <a:rPr lang="en-GB" sz="2000" dirty="0"/>
-              <a:t>Dataset represents a simulated e-commerce business scenario</a:t>
-            </a:r>
-          </a:p>
-          <a:p>
-            <a:r>
-              <a:rPr lang="en-GB" sz="2000" dirty="0"/>
-              <a:t>199 order-item records with missing unit prices were removed</a:t>
-            </a:r>
-          </a:p>
-          <a:p>
-            <a:r>
-              <a:rPr lang="en-GB" sz="2000" dirty="0"/>
-              <a:t>Refund amounts and  direct financial impact of returns / cancellations were not available</a:t>
-            </a:r>
-          </a:p>
-          <a:p>
-            <a:r>
-              <a:rPr lang="en-GB" sz="2000" dirty="0"/>
-              <a:t>Analysis covers only 2024-2025</a:t>
-            </a:r>
-          </a:p>
-        </p:txBody>
-      </p:sp>
-    </p:spTree>
-    <p:extLst>
-      <p:ext uri="{BB962C8B-B14F-4D97-AF65-F5344CB8AC3E}">
-        <p14:creationId xmlns:p14="http://schemas.microsoft.com/office/powerpoint/2010/main" val="2370239430"/>
-      </p:ext>
-    </p:extLst>
-  </p:cSld>
-  <p:clrMapOvr>
-    <a:masterClrMapping/>
-  </p:clrMapOvr>
-</p:sld>
-</file>
-
-<file path=ppt/slides/slide11.xml><?xml version="1.0" encoding="utf-8"?>
-<p:sld xmlns:a="http://schemas.openxmlformats.org/drawingml/2006/main" xmlns:r="http://schemas.openxmlformats.org/officeDocument/2006/relationships" xmlns:p="http://schemas.openxmlformats.org/presentationml/2006/main">
-  <p:cSld>
-    <p:spTree>
-      <p:nvGrpSpPr>
-        <p:cNvPr id="1" name=""/>
-        <p:cNvGrpSpPr/>
-        <p:nvPr/>
-      </p:nvGrpSpPr>
-      <p:grpSpPr>
-        <a:xfrm>
-          <a:off x="0" y="0"/>
-          <a:ext cx="0" cy="0"/>
-          <a:chOff x="0" y="0"/>
-          <a:chExt cx="0" cy="0"/>
-        </a:xfrm>
-      </p:grpSpPr>
-      <p:sp>
-        <p:nvSpPr>
           <p:cNvPr id="4" name="Title 3">
             <a:extLst>
               <a:ext uri="{FF2B5EF4-FFF2-40B4-BE49-F238E27FC236}">
@@ -4226,11 +4143,7 @@
             </a:pPr>
             <a:r>
               <a:rPr lang="en-GB" sz="2000" dirty="0"/>
-              <a:t>Raw Data → Data Cleaning → Exploratory Data Analysis → Data Modelling → KPI </a:t>
-            </a:r>
-            <a:r>
-              <a:rPr lang="en-GB" sz="2000"/>
-              <a:t>Definition →</a:t>
+              <a:t>Raw Data → Data Cleaning → Exploratory Data Analysis → Data Modelling → KPI Definition →</a:t>
             </a:r>
           </a:p>
           <a:p>
@@ -4238,12 +4151,8 @@
               <a:buNone/>
             </a:pPr>
             <a:r>
-              <a:rPr lang="en-GB" sz="2000"/>
-              <a:t>SQL </a:t>
-            </a:r>
-            <a:r>
               <a:rPr lang="en-GB" sz="2000" dirty="0"/>
-              <a:t>Analysis → Power BI Dashboard → Insights &amp; Recommendations</a:t>
+              <a:t>SQL Analysis → Power BI Dashboard → Insights &amp; Recommendations</a:t>
             </a:r>
           </a:p>
         </p:txBody>
@@ -5804,7 +5713,7 @@
           <p:cNvPr id="2" name="Title 1">
             <a:extLst>
               <a:ext uri="{FF2B5EF4-FFF2-40B4-BE49-F238E27FC236}">
-                <a16:creationId xmlns:a16="http://schemas.microsoft.com/office/drawing/2014/main" id="{8779DA9B-8B79-4A7F-BE4D-372609C51494}"/>
+                <a16:creationId xmlns:a16="http://schemas.microsoft.com/office/drawing/2014/main" id="{16860E90-D1C4-4CE2-AAC1-ECF8E164D874}"/>
               </a:ext>
             </a:extLst>
           </p:cNvPr>
@@ -5826,17 +5735,17 @@
               <a:rPr lang="en-GB" sz="3200" b="1" dirty="0">
                 <a:latin typeface="+mn-lt"/>
               </a:rPr>
-              <a:t>Key Insights</a:t>
-            </a:r>
-          </a:p>
-        </p:txBody>
-      </p:sp>
-      <p:sp>
-        <p:nvSpPr>
-          <p:cNvPr id="5" name="Content Placeholder 4">
-            <a:extLst>
-              <a:ext uri="{FF2B5EF4-FFF2-40B4-BE49-F238E27FC236}">
-                <a16:creationId xmlns:a16="http://schemas.microsoft.com/office/drawing/2014/main" id="{41E3E52F-FEDC-416C-A176-9E285842E8BB}"/>
+              <a:t>Business Recommendations</a:t>
+            </a:r>
+          </a:p>
+        </p:txBody>
+      </p:sp>
+      <p:sp>
+        <p:nvSpPr>
+          <p:cNvPr id="3" name="Content Placeholder 2">
+            <a:extLst>
+              <a:ext uri="{FF2B5EF4-FFF2-40B4-BE49-F238E27FC236}">
+                <a16:creationId xmlns:a16="http://schemas.microsoft.com/office/drawing/2014/main" id="{C1A11820-7CC3-434E-A6B8-E845AFB698D7}"/>
               </a:ext>
             </a:extLst>
           </p:cNvPr>
@@ -5860,7 +5769,7 @@
             </a:pPr>
             <a:r>
               <a:rPr lang="en-GB" sz="2000" dirty="0"/>
-              <a:t>Sales Growth – Revenue increased 21.0% from 2024 to 2025.</a:t>
+              <a:t>Monitor category-level profitability: Track revenue alongside profit margin to identify high-sales categories with weaker profitability.</a:t>
             </a:r>
           </a:p>
           <a:p>
@@ -5870,7 +5779,7 @@
             </a:pPr>
             <a:r>
               <a:rPr lang="en-GB" sz="2000" dirty="0"/>
-              <a:t>Profitability – Profit increased 27.7%, while Profit margin reached from 47.75% to 50.39%</a:t>
+              <a:t>Investigate Furniture returns: Review product expectations, descriptions, quality and fulfilment to understand the 11.66% return rate.</a:t>
             </a:r>
           </a:p>
           <a:p>
@@ -5880,7 +5789,7 @@
             </a:pPr>
             <a:r>
               <a:rPr lang="en-GB" sz="2000" dirty="0"/>
-              <a:t>Category Performance – Furniture generated the highest revenue and profit, while Storage had highest profit margin</a:t>
+              <a:t>Review Bath cancellation: Investigate the causes behind the ~4.50% cancellation rate and identify potential operational issues.</a:t>
             </a:r>
           </a:p>
           <a:p>
@@ -5890,7 +5799,7 @@
             </a:pPr>
             <a:r>
               <a:rPr lang="en-GB" sz="2000" dirty="0"/>
-              <a:t>Product Performance – Cotton Patio Chair was the highest-revenue individual product.</a:t>
+              <a:t>Evaluate high-revenue, low-margin products: Review pricing, product costs and promotional strategies to improve profitability.</a:t>
             </a:r>
           </a:p>
           <a:p>
@@ -5900,7 +5809,7 @@
             </a:pPr>
             <a:r>
               <a:rPr lang="en-GB" sz="2000" dirty="0"/>
-              <a:t>Order Status – Furniture had the highest return rate while Bath had the highest cancellation rate.</a:t>
+              <a:t>Plan for seasonal demand: Use the strong November sales pattern to support inventory and promotional planning.</a:t>
             </a:r>
           </a:p>
         </p:txBody>
@@ -5908,7 +5817,7 @@
     </p:spTree>
     <p:extLst>
       <p:ext uri="{BB962C8B-B14F-4D97-AF65-F5344CB8AC3E}">
-        <p14:creationId xmlns:p14="http://schemas.microsoft.com/office/powerpoint/2010/main" val="3992826602"/>
+        <p14:creationId xmlns:p14="http://schemas.microsoft.com/office/powerpoint/2010/main" val="1956836748"/>
       </p:ext>
     </p:extLst>
   </p:cSld>
@@ -5940,7 +5849,7 @@
           <p:cNvPr id="2" name="Title 1">
             <a:extLst>
               <a:ext uri="{FF2B5EF4-FFF2-40B4-BE49-F238E27FC236}">
-                <a16:creationId xmlns:a16="http://schemas.microsoft.com/office/drawing/2014/main" id="{16860E90-D1C4-4CE2-AAC1-ECF8E164D874}"/>
+                <a16:creationId xmlns:a16="http://schemas.microsoft.com/office/drawing/2014/main" id="{856791FB-D5D8-4AAB-B9CB-3988A9EF0411}"/>
               </a:ext>
             </a:extLst>
           </p:cNvPr>
@@ -5949,6 +5858,40 @@
           </p:cNvSpPr>
           <p:nvPr>
             <p:ph type="title"/>
+          </p:nvPr>
+        </p:nvSpPr>
+        <p:spPr/>
+        <p:txBody>
+          <a:bodyPr/>
+          <a:lstStyle/>
+          <a:p>
+            <a:r>
+              <a:rPr lang="en-GB" sz="3200" b="1" dirty="0">
+                <a:latin typeface="+mn-lt"/>
+              </a:rPr>
+              <a:t>Limitations</a:t>
+            </a:r>
+            <a:r>
+              <a:rPr lang="en-GB" dirty="0"/>
+              <a:t> </a:t>
+            </a:r>
+          </a:p>
+        </p:txBody>
+      </p:sp>
+      <p:sp>
+        <p:nvSpPr>
+          <p:cNvPr id="3" name="Content Placeholder 2">
+            <a:extLst>
+              <a:ext uri="{FF2B5EF4-FFF2-40B4-BE49-F238E27FC236}">
+                <a16:creationId xmlns:a16="http://schemas.microsoft.com/office/drawing/2014/main" id="{4420F9E1-BE3B-41D4-A11A-97EC2750AEF1}"/>
+              </a:ext>
+            </a:extLst>
+          </p:cNvPr>
+          <p:cNvSpPr>
+            <a:spLocks noGrp="1"/>
+          </p:cNvSpPr>
+          <p:nvPr>
+            <p:ph idx="1"/>
           </p:nvPr>
         </p:nvSpPr>
         <p:spPr/>
@@ -5959,84 +5902,26 @@
           <a:lstStyle/>
           <a:p>
             <a:r>
-              <a:rPr lang="en-GB" sz="3200" b="1" dirty="0">
-                <a:latin typeface="+mn-lt"/>
-              </a:rPr>
-              <a:t>Business Recommendations</a:t>
-            </a:r>
-          </a:p>
-        </p:txBody>
-      </p:sp>
-      <p:sp>
-        <p:nvSpPr>
-          <p:cNvPr id="3" name="Content Placeholder 2">
-            <a:extLst>
-              <a:ext uri="{FF2B5EF4-FFF2-40B4-BE49-F238E27FC236}">
-                <a16:creationId xmlns:a16="http://schemas.microsoft.com/office/drawing/2014/main" id="{C1A11820-7CC3-434E-A6B8-E845AFB698D7}"/>
-              </a:ext>
-            </a:extLst>
-          </p:cNvPr>
-          <p:cNvSpPr>
-            <a:spLocks noGrp="1"/>
-          </p:cNvSpPr>
-          <p:nvPr>
-            <p:ph idx="1"/>
-          </p:nvPr>
-        </p:nvSpPr>
-        <p:spPr/>
-        <p:txBody>
-          <a:bodyPr>
-            <a:normAutofit/>
-          </a:bodyPr>
-          <a:lstStyle/>
-          <a:p>
-            <a:pPr marL="514350" indent="-514350">
-              <a:buFont typeface="+mj-lt"/>
-              <a:buAutoNum type="arabicPeriod"/>
-            </a:pPr>
-            <a:r>
               <a:rPr lang="en-GB" sz="2000" dirty="0"/>
-              <a:t>Monitor category-level profitability</a:t>
-            </a:r>
-          </a:p>
-          <a:p>
-            <a:pPr marL="514350" indent="-514350">
-              <a:buFont typeface="+mj-lt"/>
-              <a:buAutoNum type="arabicPeriod"/>
-            </a:pPr>
+              <a:t>Dataset represents a simulated e-commerce business scenario</a:t>
+            </a:r>
+          </a:p>
+          <a:p>
             <a:r>
               <a:rPr lang="en-GB" sz="2000" dirty="0"/>
-              <a:t>Investigate Furniture’s high return rate</a:t>
-            </a:r>
-          </a:p>
-          <a:p>
-            <a:pPr marL="514350" indent="-514350">
-              <a:buFont typeface="+mj-lt"/>
-              <a:buAutoNum type="arabicPeriod"/>
-            </a:pPr>
+              <a:t>199 order-item records with missing unit prices were removed</a:t>
+            </a:r>
+          </a:p>
+          <a:p>
             <a:r>
               <a:rPr lang="en-GB" sz="2000" dirty="0"/>
-              <a:t>Review Bath cancellation pattern</a:t>
-            </a:r>
-          </a:p>
-          <a:p>
-            <a:pPr marL="514350" indent="-514350">
-              <a:buFont typeface="+mj-lt"/>
-              <a:buAutoNum type="arabicPeriod"/>
-            </a:pPr>
+              <a:t>Refund amounts and  direct financial impact of returns / cancellations were not available</a:t>
+            </a:r>
+          </a:p>
+          <a:p>
             <a:r>
               <a:rPr lang="en-GB" sz="2000" dirty="0"/>
-              <a:t>Evaluate pricing and costs of high-revenue products with lower margins</a:t>
-            </a:r>
-          </a:p>
-          <a:p>
-            <a:pPr marL="514350" indent="-514350">
-              <a:buFont typeface="+mj-lt"/>
-              <a:buAutoNum type="arabicPeriod"/>
-            </a:pPr>
-            <a:r>
-              <a:rPr lang="en-GB" sz="2000" dirty="0"/>
-              <a:t>Plan inventory and promotions around seasonal demand , particularly November</a:t>
+              <a:t>Analysis covers only 2024-2025</a:t>
             </a:r>
           </a:p>
         </p:txBody>
@@ -6044,7 +5929,7 @@
     </p:spTree>
     <p:extLst>
       <p:ext uri="{BB962C8B-B14F-4D97-AF65-F5344CB8AC3E}">
-        <p14:creationId xmlns:p14="http://schemas.microsoft.com/office/powerpoint/2010/main" val="1956836748"/>
+        <p14:creationId xmlns:p14="http://schemas.microsoft.com/office/powerpoint/2010/main" val="2370239430"/>
       </p:ext>
     </p:extLst>
   </p:cSld>
